--- a/docs/index.pptx
+++ b/docs/index.pptx
@@ -30,7 +30,6 @@
     <p:sldId id="278" r:id="rId24"/>
     <p:sldId id="279" r:id="rId25"/>
     <p:sldId id="280" r:id="rId26"/>
-    <p:sldId id="281" r:id="rId27"/>
   </p:sldIdLst>
   <p:sldSz cx="9144000" cy="5143500" type="screen16x9"/>
   <p:notesSz cx="6858000" cy="9144000"/>
@@ -3217,7 +3216,7 @@
             </a:pPr>
             <a:r>
               <a:rPr/>
-              <a:t>The Nix package manager (2/2)</a:t>
+              <a:t>rix: reproducible development environments with Nix (1/2)</a:t>
             </a:r>
           </a:p>
         </p:txBody>
@@ -3239,37 +3238,441 @@
           <a:p>
             <a:pPr lvl="0"/>
             <a:r>
-              <a:rPr/>
-              <a:t>To ensure reproducibility: R, R packages, and other dependencies must be explicitly managed</a:t>
-            </a:r>
-          </a:p>
-          <a:p>
-            <a:pPr lvl="0"/>
-            <a:r>
-              <a:rPr/>
-              <a:t>Nix is a package manager truly focused on reproducible builds</a:t>
-            </a:r>
-          </a:p>
-          <a:p>
-            <a:pPr lvl="0"/>
-            <a:r>
-              <a:rPr/>
-              <a:t>Nix manages everything using a single text file (called a Nix expression)!</a:t>
-            </a:r>
-          </a:p>
-          <a:p>
-            <a:pPr lvl="0"/>
-            <a:r>
-              <a:rPr/>
-              <a:t>These expressions </a:t>
-            </a:r>
-            <a:r>
-              <a:rPr i="1"/>
-              <a:t>always</a:t>
-            </a:r>
-            <a:r>
-              <a:rPr/>
-              <a:t> produce exactly the same result</a:t>
+              <a:rPr>
+                <a:latin typeface="Courier"/>
+              </a:rPr>
+              <a:t>{rix}</a:t>
+            </a:r>
+            <a:r>
+              <a:rPr/>
+              <a:t> (</a:t>
+            </a:r>
+            <a:r>
+              <a:rPr>
+                <a:hlinkClick r:id="rId2"/>
+              </a:rPr>
+              <a:t>website</a:t>
+            </a:r>
+            <a:r>
+              <a:rPr/>
+              <a:t>) simplifies writing Nix expressions!</a:t>
+            </a:r>
+          </a:p>
+          <a:p>
+            <a:pPr lvl="0"/>
+            <a:r>
+              <a:rPr/>
+              <a:t>Just use the provided </a:t>
+            </a:r>
+            <a:r>
+              <a:rPr>
+                <a:latin typeface="Courier"/>
+              </a:rPr>
+              <a:t>rix()</a:t>
+            </a:r>
+            <a:r>
+              <a:rPr/>
+              <a:t> function:</a:t>
+            </a:r>
+          </a:p>
+          <a:p>
+            <a:pPr lvl="0" indent="0" marL="0">
+              <a:buNone/>
+            </a:pPr>
+            <a:r>
+              <a:rPr/>
+              <a:t>. . .</a:t>
+            </a:r>
+          </a:p>
+          <a:p>
+            <a:pPr lvl="0" indent="0">
+              <a:buNone/>
+            </a:pPr>
+            <a:r>
+              <a:rPr>
+                <a:solidFill>
+                  <a:srgbClr val="4758AB"/>
+                </a:solidFill>
+                <a:latin typeface="Courier"/>
+              </a:rPr>
+              <a:t>library</a:t>
+            </a:r>
+            <a:r>
+              <a:rPr>
+                <a:solidFill>
+                  <a:srgbClr val="003B4F"/>
+                </a:solidFill>
+                <a:latin typeface="Courier"/>
+              </a:rPr>
+              <a:t>(rix)</a:t>
+            </a:r>
+            <a:br/>
+            <a:br/>
+            <a:r>
+              <a:rPr>
+                <a:solidFill>
+                  <a:srgbClr val="4758AB"/>
+                </a:solidFill>
+                <a:latin typeface="Courier"/>
+              </a:rPr>
+              <a:t>rix</a:t>
+            </a:r>
+            <a:r>
+              <a:rPr>
+                <a:solidFill>
+                  <a:srgbClr val="003B4F"/>
+                </a:solidFill>
+                <a:latin typeface="Courier"/>
+              </a:rPr>
+              <a:t>(</a:t>
+            </a:r>
+            <a:r>
+              <a:rPr>
+                <a:solidFill>
+                  <a:srgbClr val="657422"/>
+                </a:solidFill>
+                <a:latin typeface="Courier"/>
+              </a:rPr>
+              <a:t>date =</a:t>
+            </a:r>
+            <a:r>
+              <a:rPr>
+                <a:solidFill>
+                  <a:srgbClr val="003B4F"/>
+                </a:solidFill>
+                <a:latin typeface="Courier"/>
+              </a:rPr>
+              <a:t> </a:t>
+            </a:r>
+            <a:r>
+              <a:rPr>
+                <a:solidFill>
+                  <a:srgbClr val="20794D"/>
+                </a:solidFill>
+                <a:latin typeface="Courier"/>
+              </a:rPr>
+              <a:t>"2025-06-13"</a:t>
+            </a:r>
+            <a:r>
+              <a:rPr>
+                <a:solidFill>
+                  <a:srgbClr val="003B4F"/>
+                </a:solidFill>
+                <a:latin typeface="Courier"/>
+              </a:rPr>
+              <a:t>,</a:t>
+            </a:r>
+            <a:br/>
+            <a:r>
+              <a:rPr>
+                <a:solidFill>
+                  <a:srgbClr val="003B4F"/>
+                </a:solidFill>
+                <a:latin typeface="Courier"/>
+              </a:rPr>
+              <a:t>    </a:t>
+            </a:r>
+            <a:r>
+              <a:rPr>
+                <a:solidFill>
+                  <a:srgbClr val="657422"/>
+                </a:solidFill>
+                <a:latin typeface="Courier"/>
+              </a:rPr>
+              <a:t>r_pkgs =</a:t>
+            </a:r>
+            <a:r>
+              <a:rPr>
+                <a:solidFill>
+                  <a:srgbClr val="003B4F"/>
+                </a:solidFill>
+                <a:latin typeface="Courier"/>
+              </a:rPr>
+              <a:t> </a:t>
+            </a:r>
+            <a:r>
+              <a:rPr>
+                <a:solidFill>
+                  <a:srgbClr val="4758AB"/>
+                </a:solidFill>
+                <a:latin typeface="Courier"/>
+              </a:rPr>
+              <a:t>c</a:t>
+            </a:r>
+            <a:r>
+              <a:rPr>
+                <a:solidFill>
+                  <a:srgbClr val="003B4F"/>
+                </a:solidFill>
+                <a:latin typeface="Courier"/>
+              </a:rPr>
+              <a:t>(</a:t>
+            </a:r>
+            <a:r>
+              <a:rPr>
+                <a:solidFill>
+                  <a:srgbClr val="20794D"/>
+                </a:solidFill>
+                <a:latin typeface="Courier"/>
+              </a:rPr>
+              <a:t>"dplyr"</a:t>
+            </a:r>
+            <a:r>
+              <a:rPr>
+                <a:solidFill>
+                  <a:srgbClr val="003B4F"/>
+                </a:solidFill>
+                <a:latin typeface="Courier"/>
+              </a:rPr>
+              <a:t>, </a:t>
+            </a:r>
+            <a:r>
+              <a:rPr>
+                <a:solidFill>
+                  <a:srgbClr val="20794D"/>
+                </a:solidFill>
+                <a:latin typeface="Courier"/>
+              </a:rPr>
+              <a:t>"ggplot2"</a:t>
+            </a:r>
+            <a:r>
+              <a:rPr>
+                <a:solidFill>
+                  <a:srgbClr val="003B4F"/>
+                </a:solidFill>
+                <a:latin typeface="Courier"/>
+              </a:rPr>
+              <a:t>),</a:t>
+            </a:r>
+            <a:br/>
+            <a:r>
+              <a:rPr>
+                <a:solidFill>
+                  <a:srgbClr val="003B4F"/>
+                </a:solidFill>
+                <a:latin typeface="Courier"/>
+              </a:rPr>
+              <a:t>    </a:t>
+            </a:r>
+            <a:r>
+              <a:rPr>
+                <a:solidFill>
+                  <a:srgbClr val="657422"/>
+                </a:solidFill>
+                <a:latin typeface="Courier"/>
+              </a:rPr>
+              <a:t>system_pkgs =</a:t>
+            </a:r>
+            <a:r>
+              <a:rPr>
+                <a:solidFill>
+                  <a:srgbClr val="003B4F"/>
+                </a:solidFill>
+                <a:latin typeface="Courier"/>
+              </a:rPr>
+              <a:t> </a:t>
+            </a:r>
+            <a:r>
+              <a:rPr>
+                <a:solidFill>
+                  <a:srgbClr val="8F5902"/>
+                </a:solidFill>
+                <a:latin typeface="Courier"/>
+              </a:rPr>
+              <a:t>NULL</a:t>
+            </a:r>
+            <a:r>
+              <a:rPr>
+                <a:solidFill>
+                  <a:srgbClr val="003B4F"/>
+                </a:solidFill>
+                <a:latin typeface="Courier"/>
+              </a:rPr>
+              <a:t>,</a:t>
+            </a:r>
+            <a:br/>
+            <a:r>
+              <a:rPr>
+                <a:solidFill>
+                  <a:srgbClr val="003B4F"/>
+                </a:solidFill>
+                <a:latin typeface="Courier"/>
+              </a:rPr>
+              <a:t>    </a:t>
+            </a:r>
+            <a:r>
+              <a:rPr>
+                <a:solidFill>
+                  <a:srgbClr val="657422"/>
+                </a:solidFill>
+                <a:latin typeface="Courier"/>
+              </a:rPr>
+              <a:t>git_pkgs =</a:t>
+            </a:r>
+            <a:r>
+              <a:rPr>
+                <a:solidFill>
+                  <a:srgbClr val="003B4F"/>
+                </a:solidFill>
+                <a:latin typeface="Courier"/>
+              </a:rPr>
+              <a:t> </a:t>
+            </a:r>
+            <a:r>
+              <a:rPr>
+                <a:solidFill>
+                  <a:srgbClr val="8F5902"/>
+                </a:solidFill>
+                <a:latin typeface="Courier"/>
+              </a:rPr>
+              <a:t>NULL</a:t>
+            </a:r>
+            <a:r>
+              <a:rPr>
+                <a:solidFill>
+                  <a:srgbClr val="003B4F"/>
+                </a:solidFill>
+                <a:latin typeface="Courier"/>
+              </a:rPr>
+              <a:t>,</a:t>
+            </a:r>
+            <a:br/>
+            <a:r>
+              <a:rPr>
+                <a:solidFill>
+                  <a:srgbClr val="003B4F"/>
+                </a:solidFill>
+                <a:latin typeface="Courier"/>
+              </a:rPr>
+              <a:t>    </a:t>
+            </a:r>
+            <a:r>
+              <a:rPr>
+                <a:solidFill>
+                  <a:srgbClr val="657422"/>
+                </a:solidFill>
+                <a:latin typeface="Courier"/>
+              </a:rPr>
+              <a:t>tex_pkgs =</a:t>
+            </a:r>
+            <a:r>
+              <a:rPr>
+                <a:solidFill>
+                  <a:srgbClr val="003B4F"/>
+                </a:solidFill>
+                <a:latin typeface="Courier"/>
+              </a:rPr>
+              <a:t> </a:t>
+            </a:r>
+            <a:r>
+              <a:rPr>
+                <a:solidFill>
+                  <a:srgbClr val="8F5902"/>
+                </a:solidFill>
+                <a:latin typeface="Courier"/>
+              </a:rPr>
+              <a:t>NULL</a:t>
+            </a:r>
+            <a:r>
+              <a:rPr>
+                <a:solidFill>
+                  <a:srgbClr val="003B4F"/>
+                </a:solidFill>
+                <a:latin typeface="Courier"/>
+              </a:rPr>
+              <a:t>,</a:t>
+            </a:r>
+            <a:br/>
+            <a:r>
+              <a:rPr>
+                <a:solidFill>
+                  <a:srgbClr val="003B4F"/>
+                </a:solidFill>
+                <a:latin typeface="Courier"/>
+              </a:rPr>
+              <a:t>    </a:t>
+            </a:r>
+            <a:r>
+              <a:rPr>
+                <a:solidFill>
+                  <a:srgbClr val="657422"/>
+                </a:solidFill>
+                <a:latin typeface="Courier"/>
+              </a:rPr>
+              <a:t>ide =</a:t>
+            </a:r>
+            <a:r>
+              <a:rPr>
+                <a:solidFill>
+                  <a:srgbClr val="003B4F"/>
+                </a:solidFill>
+                <a:latin typeface="Courier"/>
+              </a:rPr>
+              <a:t> </a:t>
+            </a:r>
+            <a:r>
+              <a:rPr>
+                <a:solidFill>
+                  <a:srgbClr val="20794D"/>
+                </a:solidFill>
+                <a:latin typeface="Courier"/>
+              </a:rPr>
+              <a:t>"code"</a:t>
+            </a:r>
+            <a:r>
+              <a:rPr>
+                <a:solidFill>
+                  <a:srgbClr val="003B4F"/>
+                </a:solidFill>
+                <a:latin typeface="Courier"/>
+              </a:rPr>
+              <a:t>,</a:t>
+            </a:r>
+            <a:br/>
+            <a:r>
+              <a:rPr>
+                <a:solidFill>
+                  <a:srgbClr val="003B4F"/>
+                </a:solidFill>
+                <a:latin typeface="Courier"/>
+              </a:rPr>
+              <a:t>    </a:t>
+            </a:r>
+            <a:r>
+              <a:rPr>
+                <a:solidFill>
+                  <a:srgbClr val="657422"/>
+                </a:solidFill>
+                <a:latin typeface="Courier"/>
+              </a:rPr>
+              <a:t>project_path =</a:t>
+            </a:r>
+            <a:r>
+              <a:rPr>
+                <a:solidFill>
+                  <a:srgbClr val="003B4F"/>
+                </a:solidFill>
+                <a:latin typeface="Courier"/>
+              </a:rPr>
+              <a:t> </a:t>
+            </a:r>
+            <a:r>
+              <a:rPr>
+                <a:solidFill>
+                  <a:srgbClr val="20794D"/>
+                </a:solidFill>
+                <a:latin typeface="Courier"/>
+              </a:rPr>
+              <a:t>"."</a:t>
+            </a:r>
+            <a:r>
+              <a:rPr>
+                <a:solidFill>
+                  <a:srgbClr val="003B4F"/>
+                </a:solidFill>
+                <a:latin typeface="Courier"/>
+              </a:rPr>
+              <a:t>)</a:t>
             </a:r>
           </a:p>
         </p:txBody>
@@ -3316,7 +3719,7 @@
             </a:pPr>
             <a:r>
               <a:rPr/>
-              <a:t>rix: reproducible development environments with Nix (1/2)</a:t>
+              <a:t>rix: reproducible development environments with Nix (2/2)</a:t>
             </a:r>
           </a:p>
         </p:txBody>
@@ -3341,438 +3744,68 @@
               <a:rPr>
                 <a:latin typeface="Courier"/>
               </a:rPr>
-              <a:t>{rix}</a:t>
-            </a:r>
-            <a:r>
-              <a:rPr/>
-              <a:t> (</a:t>
-            </a:r>
-            <a:r>
-              <a:rPr>
-                <a:hlinkClick r:id="rId2"/>
-              </a:rPr>
-              <a:t>website</a:t>
-            </a:r>
-            <a:r>
-              <a:rPr/>
-              <a:t>) simplifies writing Nix expressions!</a:t>
-            </a:r>
-          </a:p>
-          <a:p>
-            <a:pPr lvl="0"/>
-            <a:r>
-              <a:rPr/>
-              <a:t>Just use the provided </a:t>
-            </a:r>
-            <a:r>
-              <a:rPr>
-                <a:latin typeface="Courier"/>
-              </a:rPr>
-              <a:t>rix()</a:t>
-            </a:r>
-            <a:r>
-              <a:rPr/>
-              <a:t> function:</a:t>
-            </a:r>
-          </a:p>
-          <a:p>
-            <a:pPr lvl="0" indent="0" marL="0">
-              <a:buNone/>
-            </a:pPr>
-            <a:r>
-              <a:rPr/>
-              <a:t>. . .</a:t>
-            </a:r>
-          </a:p>
-          <a:p>
-            <a:pPr lvl="0" indent="0">
-              <a:buNone/>
-            </a:pPr>
-            <a:r>
-              <a:rPr>
-                <a:solidFill>
-                  <a:srgbClr val="4758AB"/>
-                </a:solidFill>
-                <a:latin typeface="Courier"/>
-              </a:rPr>
-              <a:t>library</a:t>
-            </a:r>
-            <a:r>
-              <a:rPr>
-                <a:solidFill>
-                  <a:srgbClr val="003B4F"/>
-                </a:solidFill>
-                <a:latin typeface="Courier"/>
-              </a:rPr>
-              <a:t>(rix)</a:t>
-            </a:r>
-            <a:br/>
-            <a:br/>
-            <a:r>
-              <a:rPr>
-                <a:solidFill>
-                  <a:srgbClr val="4758AB"/>
-                </a:solidFill>
-                <a:latin typeface="Courier"/>
-              </a:rPr>
-              <a:t>rix</a:t>
-            </a:r>
-            <a:r>
-              <a:rPr>
-                <a:solidFill>
-                  <a:srgbClr val="003B4F"/>
-                </a:solidFill>
-                <a:latin typeface="Courier"/>
-              </a:rPr>
-              <a:t>(</a:t>
-            </a:r>
-            <a:r>
-              <a:rPr>
-                <a:solidFill>
-                  <a:srgbClr val="657422"/>
-                </a:solidFill>
-                <a:latin typeface="Courier"/>
-              </a:rPr>
-              <a:t>date =</a:t>
-            </a:r>
-            <a:r>
-              <a:rPr>
-                <a:solidFill>
-                  <a:srgbClr val="003B4F"/>
-                </a:solidFill>
-                <a:latin typeface="Courier"/>
-              </a:rPr>
-              <a:t> </a:t>
-            </a:r>
-            <a:r>
-              <a:rPr>
-                <a:solidFill>
-                  <a:srgbClr val="20794D"/>
-                </a:solidFill>
-                <a:latin typeface="Courier"/>
-              </a:rPr>
-              <a:t>"2025-06-13"</a:t>
-            </a:r>
-            <a:r>
-              <a:rPr>
-                <a:solidFill>
-                  <a:srgbClr val="003B4F"/>
-                </a:solidFill>
-                <a:latin typeface="Courier"/>
-              </a:rPr>
-              <a:t>,</a:t>
-            </a:r>
-            <a:br/>
-            <a:r>
-              <a:rPr>
-                <a:solidFill>
-                  <a:srgbClr val="003B4F"/>
-                </a:solidFill>
-                <a:latin typeface="Courier"/>
-              </a:rPr>
-              <a:t>    </a:t>
-            </a:r>
-            <a:r>
-              <a:rPr>
-                <a:solidFill>
-                  <a:srgbClr val="657422"/>
-                </a:solidFill>
-                <a:latin typeface="Courier"/>
-              </a:rPr>
-              <a:t>r_pkgs =</a:t>
-            </a:r>
-            <a:r>
-              <a:rPr>
-                <a:solidFill>
-                  <a:srgbClr val="003B4F"/>
-                </a:solidFill>
-                <a:latin typeface="Courier"/>
-              </a:rPr>
-              <a:t> </a:t>
-            </a:r>
-            <a:r>
-              <a:rPr>
-                <a:solidFill>
-                  <a:srgbClr val="4758AB"/>
-                </a:solidFill>
-                <a:latin typeface="Courier"/>
-              </a:rPr>
-              <a:t>c</a:t>
-            </a:r>
-            <a:r>
-              <a:rPr>
-                <a:solidFill>
-                  <a:srgbClr val="003B4F"/>
-                </a:solidFill>
-                <a:latin typeface="Courier"/>
-              </a:rPr>
-              <a:t>(</a:t>
-            </a:r>
-            <a:r>
-              <a:rPr>
-                <a:solidFill>
-                  <a:srgbClr val="20794D"/>
-                </a:solidFill>
-                <a:latin typeface="Courier"/>
-              </a:rPr>
-              <a:t>"dplyr"</a:t>
-            </a:r>
-            <a:r>
-              <a:rPr>
-                <a:solidFill>
-                  <a:srgbClr val="003B4F"/>
-                </a:solidFill>
-                <a:latin typeface="Courier"/>
-              </a:rPr>
-              <a:t>, </a:t>
-            </a:r>
-            <a:r>
-              <a:rPr>
-                <a:solidFill>
-                  <a:srgbClr val="20794D"/>
-                </a:solidFill>
-                <a:latin typeface="Courier"/>
-              </a:rPr>
-              <a:t>"ggplot2"</a:t>
-            </a:r>
-            <a:r>
-              <a:rPr>
-                <a:solidFill>
-                  <a:srgbClr val="003B4F"/>
-                </a:solidFill>
-                <a:latin typeface="Courier"/>
-              </a:rPr>
-              <a:t>),</a:t>
-            </a:r>
-            <a:br/>
-            <a:r>
-              <a:rPr>
-                <a:solidFill>
-                  <a:srgbClr val="003B4F"/>
-                </a:solidFill>
-                <a:latin typeface="Courier"/>
-              </a:rPr>
-              <a:t>    </a:t>
-            </a:r>
-            <a:r>
-              <a:rPr>
-                <a:solidFill>
-                  <a:srgbClr val="657422"/>
-                </a:solidFill>
-                <a:latin typeface="Courier"/>
-              </a:rPr>
-              <a:t>system_pkgs =</a:t>
-            </a:r>
-            <a:r>
-              <a:rPr>
-                <a:solidFill>
-                  <a:srgbClr val="003B4F"/>
-                </a:solidFill>
-                <a:latin typeface="Courier"/>
-              </a:rPr>
-              <a:t> </a:t>
-            </a:r>
-            <a:r>
-              <a:rPr>
-                <a:solidFill>
-                  <a:srgbClr val="8F5902"/>
-                </a:solidFill>
-                <a:latin typeface="Courier"/>
-              </a:rPr>
-              <a:t>NULL</a:t>
-            </a:r>
-            <a:r>
-              <a:rPr>
-                <a:solidFill>
-                  <a:srgbClr val="003B4F"/>
-                </a:solidFill>
-                <a:latin typeface="Courier"/>
-              </a:rPr>
-              <a:t>,</a:t>
-            </a:r>
-            <a:br/>
-            <a:r>
-              <a:rPr>
-                <a:solidFill>
-                  <a:srgbClr val="003B4F"/>
-                </a:solidFill>
-                <a:latin typeface="Courier"/>
-              </a:rPr>
-              <a:t>    </a:t>
-            </a:r>
-            <a:r>
-              <a:rPr>
-                <a:solidFill>
-                  <a:srgbClr val="657422"/>
-                </a:solidFill>
-                <a:latin typeface="Courier"/>
-              </a:rPr>
-              <a:t>git_pkgs =</a:t>
-            </a:r>
-            <a:r>
-              <a:rPr>
-                <a:solidFill>
-                  <a:srgbClr val="003B4F"/>
-                </a:solidFill>
-                <a:latin typeface="Courier"/>
-              </a:rPr>
-              <a:t> </a:t>
-            </a:r>
-            <a:r>
-              <a:rPr>
-                <a:solidFill>
-                  <a:srgbClr val="8F5902"/>
-                </a:solidFill>
-                <a:latin typeface="Courier"/>
-              </a:rPr>
-              <a:t>NULL</a:t>
-            </a:r>
-            <a:r>
-              <a:rPr>
-                <a:solidFill>
-                  <a:srgbClr val="003B4F"/>
-                </a:solidFill>
-                <a:latin typeface="Courier"/>
-              </a:rPr>
-              <a:t>,</a:t>
-            </a:r>
-            <a:br/>
-            <a:r>
-              <a:rPr>
-                <a:solidFill>
-                  <a:srgbClr val="003B4F"/>
-                </a:solidFill>
-                <a:latin typeface="Courier"/>
-              </a:rPr>
-              <a:t>    </a:t>
-            </a:r>
-            <a:r>
-              <a:rPr>
-                <a:solidFill>
-                  <a:srgbClr val="657422"/>
-                </a:solidFill>
-                <a:latin typeface="Courier"/>
-              </a:rPr>
-              <a:t>tex_pkgs =</a:t>
-            </a:r>
-            <a:r>
-              <a:rPr>
-                <a:solidFill>
-                  <a:srgbClr val="003B4F"/>
-                </a:solidFill>
-                <a:latin typeface="Courier"/>
-              </a:rPr>
-              <a:t> </a:t>
-            </a:r>
-            <a:r>
-              <a:rPr>
-                <a:solidFill>
-                  <a:srgbClr val="8F5902"/>
-                </a:solidFill>
-                <a:latin typeface="Courier"/>
-              </a:rPr>
-              <a:t>NULL</a:t>
-            </a:r>
-            <a:r>
-              <a:rPr>
-                <a:solidFill>
-                  <a:srgbClr val="003B4F"/>
-                </a:solidFill>
-                <a:latin typeface="Courier"/>
-              </a:rPr>
-              <a:t>,</a:t>
-            </a:r>
-            <a:br/>
-            <a:r>
-              <a:rPr>
-                <a:solidFill>
-                  <a:srgbClr val="003B4F"/>
-                </a:solidFill>
-                <a:latin typeface="Courier"/>
-              </a:rPr>
-              <a:t>    </a:t>
-            </a:r>
-            <a:r>
-              <a:rPr>
-                <a:solidFill>
-                  <a:srgbClr val="657422"/>
-                </a:solidFill>
-                <a:latin typeface="Courier"/>
-              </a:rPr>
-              <a:t>ide =</a:t>
-            </a:r>
-            <a:r>
-              <a:rPr>
-                <a:solidFill>
-                  <a:srgbClr val="003B4F"/>
-                </a:solidFill>
-                <a:latin typeface="Courier"/>
-              </a:rPr>
-              <a:t> </a:t>
-            </a:r>
-            <a:r>
-              <a:rPr>
-                <a:solidFill>
-                  <a:srgbClr val="20794D"/>
-                </a:solidFill>
-                <a:latin typeface="Courier"/>
-              </a:rPr>
-              <a:t>"code"</a:t>
-            </a:r>
-            <a:r>
-              <a:rPr>
-                <a:solidFill>
-                  <a:srgbClr val="003B4F"/>
-                </a:solidFill>
-                <a:latin typeface="Courier"/>
-              </a:rPr>
-              <a:t>,</a:t>
-            </a:r>
-            <a:br/>
-            <a:r>
-              <a:rPr>
-                <a:solidFill>
-                  <a:srgbClr val="003B4F"/>
-                </a:solidFill>
-                <a:latin typeface="Courier"/>
-              </a:rPr>
-              <a:t>    </a:t>
-            </a:r>
-            <a:r>
-              <a:rPr>
-                <a:solidFill>
-                  <a:srgbClr val="657422"/>
-                </a:solidFill>
-                <a:latin typeface="Courier"/>
-              </a:rPr>
-              <a:t>project_path =</a:t>
-            </a:r>
-            <a:r>
-              <a:rPr>
-                <a:solidFill>
-                  <a:srgbClr val="003B4F"/>
-                </a:solidFill>
-                <a:latin typeface="Courier"/>
-              </a:rPr>
-              <a:t> </a:t>
-            </a:r>
-            <a:r>
-              <a:rPr>
-                <a:solidFill>
-                  <a:srgbClr val="20794D"/>
-                </a:solidFill>
-                <a:latin typeface="Courier"/>
-              </a:rPr>
-              <a:t>"."</a:t>
-            </a:r>
-            <a:r>
-              <a:rPr>
-                <a:solidFill>
-                  <a:srgbClr val="003B4F"/>
-                </a:solidFill>
-                <a:latin typeface="Courier"/>
-              </a:rPr>
-              <a:t>)</a:t>
+              <a:t>rix::rix()</a:t>
+            </a:r>
+            <a:r>
+              <a:rPr/>
+              <a:t> generates a </a:t>
+            </a:r>
+            <a:r>
+              <a:rPr>
+                <a:latin typeface="Courier"/>
+              </a:rPr>
+              <a:t>default.nix</a:t>
+            </a:r>
+            <a:r>
+              <a:rPr/>
+              <a:t> file</a:t>
+            </a:r>
+          </a:p>
+          <a:p>
+            <a:pPr lvl="0"/>
+            <a:r>
+              <a:rPr/>
+              <a:t>Build the expressions with </a:t>
+            </a:r>
+            <a:r>
+              <a:rPr>
+                <a:latin typeface="Courier"/>
+              </a:rPr>
+              <a:t>nix-build</a:t>
+            </a:r>
+            <a:r>
+              <a:rPr/>
+              <a:t> (in terminal) or </a:t>
+            </a:r>
+            <a:r>
+              <a:rPr>
+                <a:latin typeface="Courier"/>
+              </a:rPr>
+              <a:t>rix::nix_build()</a:t>
+            </a:r>
+            <a:r>
+              <a:rPr/>
+              <a:t> from R</a:t>
+            </a:r>
+          </a:p>
+          <a:p>
+            <a:pPr lvl="0"/>
+            <a:r>
+              <a:rPr/>
+              <a:t>Access the development environment with </a:t>
+            </a:r>
+            <a:r>
+              <a:rPr>
+                <a:latin typeface="Courier"/>
+              </a:rPr>
+              <a:t>nix-shell</a:t>
+            </a:r>
+          </a:p>
+          <a:p>
+            <a:pPr lvl="0"/>
+            <a:r>
+              <a:rPr/>
+              <a:t>Expressions can be generated even without Nix installed (with some limitations)</a:t>
             </a:r>
           </a:p>
         </p:txBody>
@@ -3819,7 +3852,7 @@
             </a:pPr>
             <a:r>
               <a:rPr/>
-              <a:t>rix: reproducible development environments with Nix (2/2)</a:t>
+              <a:t>Polyglot environments with rix</a:t>
             </a:r>
           </a:p>
         </p:txBody>
@@ -3844,68 +3877,545 @@
               <a:rPr>
                 <a:latin typeface="Courier"/>
               </a:rPr>
-              <a:t>rix::rix()</a:t>
-            </a:r>
-            <a:r>
-              <a:rPr/>
-              <a:t> generates a </a:t>
-            </a:r>
-            <a:r>
-              <a:rPr>
-                <a:latin typeface="Courier"/>
-              </a:rPr>
-              <a:t>default.nix</a:t>
-            </a:r>
-            <a:r>
-              <a:rPr/>
-              <a:t> file</a:t>
-            </a:r>
-          </a:p>
-          <a:p>
-            <a:pPr lvl="0"/>
-            <a:r>
-              <a:rPr/>
-              <a:t>Build the expressions with </a:t>
-            </a:r>
-            <a:r>
-              <a:rPr>
-                <a:latin typeface="Courier"/>
-              </a:rPr>
-              <a:t>nix-build</a:t>
-            </a:r>
-            <a:r>
-              <a:rPr/>
-              <a:t> (in terminal) or </a:t>
-            </a:r>
-            <a:r>
-              <a:rPr>
-                <a:latin typeface="Courier"/>
-              </a:rPr>
-              <a:t>rix::nix_build()</a:t>
-            </a:r>
-            <a:r>
-              <a:rPr/>
-              <a:t> from R</a:t>
-            </a:r>
-          </a:p>
-          <a:p>
-            <a:pPr lvl="0"/>
-            <a:r>
-              <a:rPr/>
-              <a:t>Access the development environment with </a:t>
-            </a:r>
-            <a:r>
-              <a:rPr>
-                <a:latin typeface="Courier"/>
-              </a:rPr>
-              <a:t>nix-shell</a:t>
-            </a:r>
-          </a:p>
-          <a:p>
-            <a:pPr lvl="0"/>
-            <a:r>
-              <a:rPr/>
-              <a:t>Expressions can be generated even without Nix installed (with some limitations)</a:t>
+              <a:t>rix()</a:t>
+            </a:r>
+            <a:r>
+              <a:rPr/>
+              <a:t> supports Python and Julia alongside R:</a:t>
+            </a:r>
+          </a:p>
+          <a:p>
+            <a:pPr lvl="0" indent="0" marL="0">
+              <a:buNone/>
+            </a:pPr>
+            <a:r>
+              <a:rPr/>
+              <a:t>. . .</a:t>
+            </a:r>
+          </a:p>
+          <a:p>
+            <a:pPr lvl="0" indent="0">
+              <a:buNone/>
+            </a:pPr>
+            <a:r>
+              <a:rPr>
+                <a:solidFill>
+                  <a:srgbClr val="4758AB"/>
+                </a:solidFill>
+                <a:latin typeface="Courier"/>
+              </a:rPr>
+              <a:t>rix</a:t>
+            </a:r>
+            <a:r>
+              <a:rPr>
+                <a:solidFill>
+                  <a:srgbClr val="003B4F"/>
+                </a:solidFill>
+                <a:latin typeface="Courier"/>
+              </a:rPr>
+              <a:t>(</a:t>
+            </a:r>
+            <a:r>
+              <a:rPr>
+                <a:solidFill>
+                  <a:srgbClr val="657422"/>
+                </a:solidFill>
+                <a:latin typeface="Courier"/>
+              </a:rPr>
+              <a:t>date =</a:t>
+            </a:r>
+            <a:r>
+              <a:rPr>
+                <a:solidFill>
+                  <a:srgbClr val="003B4F"/>
+                </a:solidFill>
+                <a:latin typeface="Courier"/>
+              </a:rPr>
+              <a:t> </a:t>
+            </a:r>
+            <a:r>
+              <a:rPr>
+                <a:solidFill>
+                  <a:srgbClr val="20794D"/>
+                </a:solidFill>
+                <a:latin typeface="Courier"/>
+              </a:rPr>
+              <a:t>"2025-06-09"</a:t>
+            </a:r>
+            <a:r>
+              <a:rPr>
+                <a:solidFill>
+                  <a:srgbClr val="003B4F"/>
+                </a:solidFill>
+                <a:latin typeface="Courier"/>
+              </a:rPr>
+              <a:t>,</a:t>
+            </a:r>
+            <a:br/>
+            <a:r>
+              <a:rPr>
+                <a:solidFill>
+                  <a:srgbClr val="003B4F"/>
+                </a:solidFill>
+                <a:latin typeface="Courier"/>
+              </a:rPr>
+              <a:t>    </a:t>
+            </a:r>
+            <a:r>
+              <a:rPr>
+                <a:solidFill>
+                  <a:srgbClr val="657422"/>
+                </a:solidFill>
+                <a:latin typeface="Courier"/>
+              </a:rPr>
+              <a:t>r_pkgs =</a:t>
+            </a:r>
+            <a:r>
+              <a:rPr>
+                <a:solidFill>
+                  <a:srgbClr val="003B4F"/>
+                </a:solidFill>
+                <a:latin typeface="Courier"/>
+              </a:rPr>
+              <a:t> </a:t>
+            </a:r>
+            <a:r>
+              <a:rPr>
+                <a:solidFill>
+                  <a:srgbClr val="4758AB"/>
+                </a:solidFill>
+                <a:latin typeface="Courier"/>
+              </a:rPr>
+              <a:t>c</a:t>
+            </a:r>
+            <a:r>
+              <a:rPr>
+                <a:solidFill>
+                  <a:srgbClr val="003B4F"/>
+                </a:solidFill>
+                <a:latin typeface="Courier"/>
+              </a:rPr>
+              <a:t>(</a:t>
+            </a:r>
+            <a:r>
+              <a:rPr>
+                <a:solidFill>
+                  <a:srgbClr val="20794D"/>
+                </a:solidFill>
+                <a:latin typeface="Courier"/>
+              </a:rPr>
+              <a:t>"tidyr"</a:t>
+            </a:r>
+            <a:r>
+              <a:rPr>
+                <a:solidFill>
+                  <a:srgbClr val="003B4F"/>
+                </a:solidFill>
+                <a:latin typeface="Courier"/>
+              </a:rPr>
+              <a:t>, </a:t>
+            </a:r>
+            <a:r>
+              <a:rPr>
+                <a:solidFill>
+                  <a:srgbClr val="20794D"/>
+                </a:solidFill>
+                <a:latin typeface="Courier"/>
+              </a:rPr>
+              <a:t>"dplyr"</a:t>
+            </a:r>
+            <a:r>
+              <a:rPr>
+                <a:solidFill>
+                  <a:srgbClr val="003B4F"/>
+                </a:solidFill>
+                <a:latin typeface="Courier"/>
+              </a:rPr>
+              <a:t>, </a:t>
+            </a:r>
+            <a:r>
+              <a:rPr>
+                <a:solidFill>
+                  <a:srgbClr val="20794D"/>
+                </a:solidFill>
+                <a:latin typeface="Courier"/>
+              </a:rPr>
+              <a:t>"ggplot2"</a:t>
+            </a:r>
+            <a:r>
+              <a:rPr>
+                <a:solidFill>
+                  <a:srgbClr val="003B4F"/>
+                </a:solidFill>
+                <a:latin typeface="Courier"/>
+              </a:rPr>
+              <a:t>, </a:t>
+            </a:r>
+            <a:r>
+              <a:rPr>
+                <a:solidFill>
+                  <a:srgbClr val="20794D"/>
+                </a:solidFill>
+                <a:latin typeface="Courier"/>
+              </a:rPr>
+              <a:t>"languageserver"</a:t>
+            </a:r>
+            <a:r>
+              <a:rPr>
+                <a:solidFill>
+                  <a:srgbClr val="003B4F"/>
+                </a:solidFill>
+                <a:latin typeface="Courier"/>
+              </a:rPr>
+              <a:t>),</a:t>
+            </a:r>
+            <a:br/>
+            <a:r>
+              <a:rPr>
+                <a:solidFill>
+                  <a:srgbClr val="003B4F"/>
+                </a:solidFill>
+                <a:latin typeface="Courier"/>
+              </a:rPr>
+              <a:t>    </a:t>
+            </a:r>
+            <a:r>
+              <a:rPr>
+                <a:solidFill>
+                  <a:srgbClr val="657422"/>
+                </a:solidFill>
+                <a:latin typeface="Courier"/>
+              </a:rPr>
+              <a:t>py_conf =</a:t>
+            </a:r>
+            <a:r>
+              <a:rPr>
+                <a:solidFill>
+                  <a:srgbClr val="003B4F"/>
+                </a:solidFill>
+                <a:latin typeface="Courier"/>
+              </a:rPr>
+              <a:t> </a:t>
+            </a:r>
+            <a:r>
+              <a:rPr>
+                <a:solidFill>
+                  <a:srgbClr val="4758AB"/>
+                </a:solidFill>
+                <a:latin typeface="Courier"/>
+              </a:rPr>
+              <a:t>list</a:t>
+            </a:r>
+            <a:r>
+              <a:rPr>
+                <a:solidFill>
+                  <a:srgbClr val="003B4F"/>
+                </a:solidFill>
+                <a:latin typeface="Courier"/>
+              </a:rPr>
+              <a:t>(</a:t>
+            </a:r>
+            <a:br/>
+            <a:r>
+              <a:rPr>
+                <a:solidFill>
+                  <a:srgbClr val="003B4F"/>
+                </a:solidFill>
+                <a:latin typeface="Courier"/>
+              </a:rPr>
+              <a:t>      </a:t>
+            </a:r>
+            <a:r>
+              <a:rPr>
+                <a:solidFill>
+                  <a:srgbClr val="657422"/>
+                </a:solidFill>
+                <a:latin typeface="Courier"/>
+              </a:rPr>
+              <a:t>py_version =</a:t>
+            </a:r>
+            <a:r>
+              <a:rPr>
+                <a:solidFill>
+                  <a:srgbClr val="003B4F"/>
+                </a:solidFill>
+                <a:latin typeface="Courier"/>
+              </a:rPr>
+              <a:t> </a:t>
+            </a:r>
+            <a:r>
+              <a:rPr>
+                <a:solidFill>
+                  <a:srgbClr val="20794D"/>
+                </a:solidFill>
+                <a:latin typeface="Courier"/>
+              </a:rPr>
+              <a:t>"3.13"</a:t>
+            </a:r>
+            <a:r>
+              <a:rPr>
+                <a:solidFill>
+                  <a:srgbClr val="003B4F"/>
+                </a:solidFill>
+                <a:latin typeface="Courier"/>
+              </a:rPr>
+              <a:t>, </a:t>
+            </a:r>
+            <a:br/>
+            <a:r>
+              <a:rPr>
+                <a:solidFill>
+                  <a:srgbClr val="003B4F"/>
+                </a:solidFill>
+                <a:latin typeface="Courier"/>
+              </a:rPr>
+              <a:t>      </a:t>
+            </a:r>
+            <a:r>
+              <a:rPr>
+                <a:solidFill>
+                  <a:srgbClr val="657422"/>
+                </a:solidFill>
+                <a:latin typeface="Courier"/>
+              </a:rPr>
+              <a:t>py_pkgs =</a:t>
+            </a:r>
+            <a:r>
+              <a:rPr>
+                <a:solidFill>
+                  <a:srgbClr val="003B4F"/>
+                </a:solidFill>
+                <a:latin typeface="Courier"/>
+              </a:rPr>
+              <a:t> </a:t>
+            </a:r>
+            <a:r>
+              <a:rPr>
+                <a:solidFill>
+                  <a:srgbClr val="4758AB"/>
+                </a:solidFill>
+                <a:latin typeface="Courier"/>
+              </a:rPr>
+              <a:t>c</a:t>
+            </a:r>
+            <a:r>
+              <a:rPr>
+                <a:solidFill>
+                  <a:srgbClr val="003B4F"/>
+                </a:solidFill>
+                <a:latin typeface="Courier"/>
+              </a:rPr>
+              <a:t>(</a:t>
+            </a:r>
+            <a:r>
+              <a:rPr>
+                <a:solidFill>
+                  <a:srgbClr val="20794D"/>
+                </a:solidFill>
+                <a:latin typeface="Courier"/>
+              </a:rPr>
+              <a:t>"polars"</a:t>
+            </a:r>
+            <a:r>
+              <a:rPr>
+                <a:solidFill>
+                  <a:srgbClr val="003B4F"/>
+                </a:solidFill>
+                <a:latin typeface="Courier"/>
+              </a:rPr>
+              <a:t>, </a:t>
+            </a:r>
+            <a:r>
+              <a:rPr>
+                <a:solidFill>
+                  <a:srgbClr val="20794D"/>
+                </a:solidFill>
+                <a:latin typeface="Courier"/>
+              </a:rPr>
+              <a:t>"scikit-learn"</a:t>
+            </a:r>
+            <a:r>
+              <a:rPr>
+                <a:solidFill>
+                  <a:srgbClr val="003B4F"/>
+                </a:solidFill>
+                <a:latin typeface="Courier"/>
+              </a:rPr>
+              <a:t>)</a:t>
+            </a:r>
+            <a:br/>
+            <a:r>
+              <a:rPr>
+                <a:solidFill>
+                  <a:srgbClr val="003B4F"/>
+                </a:solidFill>
+                <a:latin typeface="Courier"/>
+              </a:rPr>
+              <a:t>    ),</a:t>
+            </a:r>
+            <a:br/>
+            <a:r>
+              <a:rPr>
+                <a:solidFill>
+                  <a:srgbClr val="003B4F"/>
+                </a:solidFill>
+                <a:latin typeface="Courier"/>
+              </a:rPr>
+              <a:t>    </a:t>
+            </a:r>
+            <a:r>
+              <a:rPr>
+                <a:solidFill>
+                  <a:srgbClr val="657422"/>
+                </a:solidFill>
+                <a:latin typeface="Courier"/>
+              </a:rPr>
+              <a:t>ide =</a:t>
+            </a:r>
+            <a:r>
+              <a:rPr>
+                <a:solidFill>
+                  <a:srgbClr val="003B4F"/>
+                </a:solidFill>
+                <a:latin typeface="Courier"/>
+              </a:rPr>
+              <a:t> </a:t>
+            </a:r>
+            <a:r>
+              <a:rPr>
+                <a:solidFill>
+                  <a:srgbClr val="20794D"/>
+                </a:solidFill>
+                <a:latin typeface="Courier"/>
+              </a:rPr>
+              <a:t>"none"</a:t>
+            </a:r>
+            <a:r>
+              <a:rPr>
+                <a:solidFill>
+                  <a:srgbClr val="003B4F"/>
+                </a:solidFill>
+                <a:latin typeface="Courier"/>
+              </a:rPr>
+              <a:t>,</a:t>
+            </a:r>
+            <a:br/>
+            <a:r>
+              <a:rPr>
+                <a:solidFill>
+                  <a:srgbClr val="003B4F"/>
+                </a:solidFill>
+                <a:latin typeface="Courier"/>
+              </a:rPr>
+              <a:t>    </a:t>
+            </a:r>
+            <a:r>
+              <a:rPr>
+                <a:solidFill>
+                  <a:srgbClr val="657422"/>
+                </a:solidFill>
+                <a:latin typeface="Courier"/>
+              </a:rPr>
+              <a:t>project_path =</a:t>
+            </a:r>
+            <a:r>
+              <a:rPr>
+                <a:solidFill>
+                  <a:srgbClr val="003B4F"/>
+                </a:solidFill>
+                <a:latin typeface="Courier"/>
+              </a:rPr>
+              <a:t> </a:t>
+            </a:r>
+            <a:r>
+              <a:rPr>
+                <a:solidFill>
+                  <a:srgbClr val="20794D"/>
+                </a:solidFill>
+                <a:latin typeface="Courier"/>
+              </a:rPr>
+              <a:t>"."</a:t>
+            </a:r>
+            <a:r>
+              <a:rPr>
+                <a:solidFill>
+                  <a:srgbClr val="003B4F"/>
+                </a:solidFill>
+                <a:latin typeface="Courier"/>
+              </a:rPr>
+              <a:t>,</a:t>
+            </a:r>
+            <a:br/>
+            <a:r>
+              <a:rPr>
+                <a:solidFill>
+                  <a:srgbClr val="003B4F"/>
+                </a:solidFill>
+                <a:latin typeface="Courier"/>
+              </a:rPr>
+              <a:t>    </a:t>
+            </a:r>
+            <a:r>
+              <a:rPr>
+                <a:solidFill>
+                  <a:srgbClr val="657422"/>
+                </a:solidFill>
+                <a:latin typeface="Courier"/>
+              </a:rPr>
+              <a:t>overwrite =</a:t>
+            </a:r>
+            <a:r>
+              <a:rPr>
+                <a:solidFill>
+                  <a:srgbClr val="003B4F"/>
+                </a:solidFill>
+                <a:latin typeface="Courier"/>
+              </a:rPr>
+              <a:t> </a:t>
+            </a:r>
+            <a:r>
+              <a:rPr>
+                <a:solidFill>
+                  <a:srgbClr val="8F5902"/>
+                </a:solidFill>
+                <a:latin typeface="Courier"/>
+              </a:rPr>
+              <a:t>TRUE</a:t>
+            </a:r>
+            <a:r>
+              <a:rPr>
+                <a:solidFill>
+                  <a:srgbClr val="003B4F"/>
+                </a:solidFill>
+                <a:latin typeface="Courier"/>
+              </a:rPr>
+              <a:t>)</a:t>
+            </a:r>
+          </a:p>
+          <a:p>
+            <a:pPr lvl="0"/>
+            <a:r>
+              <a:rPr/>
+              <a:t>Julia: use </a:t>
+            </a:r>
+            <a:r>
+              <a:rPr>
+                <a:latin typeface="Courier"/>
+              </a:rPr>
+              <a:t>jl_conf = list(jl_version = "1.10", jl_pkgs = c(...))</a:t>
+            </a:r>
+          </a:p>
+          <a:p>
+            <a:pPr lvl="0"/>
+            <a:r>
+              <a:rPr/>
+              <a:t>See: </a:t>
+            </a:r>
+            <a:r>
+              <a:rPr>
+                <a:latin typeface="Courier"/>
+              </a:rPr>
+              <a:t>scripts/nix_expressions/02_native_positron_example/</a:t>
             </a:r>
           </a:p>
         </p:txBody>
@@ -3952,7 +4462,7 @@
             </a:pPr>
             <a:r>
               <a:rPr/>
-              <a:t>Polyglot environments with rix</a:t>
+              <a:t>Demo</a:t>
             </a:r>
           </a:p>
         </p:txBody>
@@ -3974,548 +4484,99 @@
           <a:p>
             <a:pPr lvl="0"/>
             <a:r>
-              <a:rPr>
-                <a:latin typeface="Courier"/>
-              </a:rPr>
-              <a:t>rix()</a:t>
-            </a:r>
-            <a:r>
-              <a:rPr/>
-              <a:t> supports Python and Julia alongside R:</a:t>
-            </a:r>
-          </a:p>
-          <a:p>
-            <a:pPr lvl="0" indent="0" marL="0">
-              <a:buNone/>
-            </a:pPr>
-            <a:r>
-              <a:rPr/>
-              <a:t>. . .</a:t>
-            </a:r>
-          </a:p>
-          <a:p>
-            <a:pPr lvl="0" indent="0">
-              <a:buNone/>
-            </a:pPr>
-            <a:r>
-              <a:rPr>
-                <a:solidFill>
-                  <a:srgbClr val="4758AB"/>
-                </a:solidFill>
-                <a:latin typeface="Courier"/>
-              </a:rPr>
-              <a:t>rix</a:t>
-            </a:r>
-            <a:r>
-              <a:rPr>
-                <a:solidFill>
-                  <a:srgbClr val="003B4F"/>
-                </a:solidFill>
-                <a:latin typeface="Courier"/>
-              </a:rPr>
-              <a:t>(</a:t>
-            </a:r>
-            <a:r>
-              <a:rPr>
-                <a:solidFill>
-                  <a:srgbClr val="657422"/>
-                </a:solidFill>
-                <a:latin typeface="Courier"/>
-              </a:rPr>
-              <a:t>date =</a:t>
-            </a:r>
-            <a:r>
-              <a:rPr>
-                <a:solidFill>
-                  <a:srgbClr val="003B4F"/>
-                </a:solidFill>
-                <a:latin typeface="Courier"/>
-              </a:rPr>
-              <a:t> </a:t>
-            </a:r>
-            <a:r>
-              <a:rPr>
-                <a:solidFill>
-                  <a:srgbClr val="20794D"/>
-                </a:solidFill>
-                <a:latin typeface="Courier"/>
-              </a:rPr>
-              <a:t>"2025-06-09"</a:t>
-            </a:r>
-            <a:r>
-              <a:rPr>
-                <a:solidFill>
-                  <a:srgbClr val="003B4F"/>
-                </a:solidFill>
-                <a:latin typeface="Courier"/>
-              </a:rPr>
-              <a:t>,</a:t>
-            </a:r>
-            <a:br/>
-            <a:r>
-              <a:rPr>
-                <a:solidFill>
-                  <a:srgbClr val="003B4F"/>
-                </a:solidFill>
-                <a:latin typeface="Courier"/>
-              </a:rPr>
-              <a:t>    </a:t>
-            </a:r>
-            <a:r>
-              <a:rPr>
-                <a:solidFill>
-                  <a:srgbClr val="657422"/>
-                </a:solidFill>
-                <a:latin typeface="Courier"/>
-              </a:rPr>
-              <a:t>r_pkgs =</a:t>
-            </a:r>
-            <a:r>
-              <a:rPr>
-                <a:solidFill>
-                  <a:srgbClr val="003B4F"/>
-                </a:solidFill>
-                <a:latin typeface="Courier"/>
-              </a:rPr>
-              <a:t> </a:t>
-            </a:r>
-            <a:r>
-              <a:rPr>
-                <a:solidFill>
-                  <a:srgbClr val="4758AB"/>
-                </a:solidFill>
-                <a:latin typeface="Courier"/>
-              </a:rPr>
-              <a:t>c</a:t>
-            </a:r>
-            <a:r>
-              <a:rPr>
-                <a:solidFill>
-                  <a:srgbClr val="003B4F"/>
-                </a:solidFill>
-                <a:latin typeface="Courier"/>
-              </a:rPr>
-              <a:t>(</a:t>
-            </a:r>
-            <a:r>
-              <a:rPr>
-                <a:solidFill>
-                  <a:srgbClr val="20794D"/>
-                </a:solidFill>
-                <a:latin typeface="Courier"/>
-              </a:rPr>
-              <a:t>"tidyr"</a:t>
-            </a:r>
-            <a:r>
-              <a:rPr>
-                <a:solidFill>
-                  <a:srgbClr val="003B4F"/>
-                </a:solidFill>
-                <a:latin typeface="Courier"/>
-              </a:rPr>
-              <a:t>, </a:t>
-            </a:r>
-            <a:r>
-              <a:rPr>
-                <a:solidFill>
-                  <a:srgbClr val="20794D"/>
-                </a:solidFill>
-                <a:latin typeface="Courier"/>
-              </a:rPr>
-              <a:t>"dplyr"</a:t>
-            </a:r>
-            <a:r>
-              <a:rPr>
-                <a:solidFill>
-                  <a:srgbClr val="003B4F"/>
-                </a:solidFill>
-                <a:latin typeface="Courier"/>
-              </a:rPr>
-              <a:t>, </a:t>
-            </a:r>
-            <a:r>
-              <a:rPr>
-                <a:solidFill>
-                  <a:srgbClr val="20794D"/>
-                </a:solidFill>
-                <a:latin typeface="Courier"/>
-              </a:rPr>
-              <a:t>"ggplot2"</a:t>
-            </a:r>
-            <a:r>
-              <a:rPr>
-                <a:solidFill>
-                  <a:srgbClr val="003B4F"/>
-                </a:solidFill>
-                <a:latin typeface="Courier"/>
-              </a:rPr>
-              <a:t>, </a:t>
-            </a:r>
-            <a:r>
-              <a:rPr>
-                <a:solidFill>
-                  <a:srgbClr val="20794D"/>
-                </a:solidFill>
-                <a:latin typeface="Courier"/>
-              </a:rPr>
-              <a:t>"languageserver"</a:t>
-            </a:r>
-            <a:r>
-              <a:rPr>
-                <a:solidFill>
-                  <a:srgbClr val="003B4F"/>
-                </a:solidFill>
-                <a:latin typeface="Courier"/>
-              </a:rPr>
-              <a:t>),</a:t>
-            </a:r>
-            <a:br/>
-            <a:r>
-              <a:rPr>
-                <a:solidFill>
-                  <a:srgbClr val="003B4F"/>
-                </a:solidFill>
-                <a:latin typeface="Courier"/>
-              </a:rPr>
-              <a:t>    </a:t>
-            </a:r>
-            <a:r>
-              <a:rPr>
-                <a:solidFill>
-                  <a:srgbClr val="657422"/>
-                </a:solidFill>
-                <a:latin typeface="Courier"/>
-              </a:rPr>
-              <a:t>py_conf =</a:t>
-            </a:r>
-            <a:r>
-              <a:rPr>
-                <a:solidFill>
-                  <a:srgbClr val="003B4F"/>
-                </a:solidFill>
-                <a:latin typeface="Courier"/>
-              </a:rPr>
-              <a:t> </a:t>
-            </a:r>
-            <a:r>
-              <a:rPr>
-                <a:solidFill>
-                  <a:srgbClr val="4758AB"/>
-                </a:solidFill>
-                <a:latin typeface="Courier"/>
-              </a:rPr>
-              <a:t>list</a:t>
-            </a:r>
-            <a:r>
-              <a:rPr>
-                <a:solidFill>
-                  <a:srgbClr val="003B4F"/>
-                </a:solidFill>
-                <a:latin typeface="Courier"/>
-              </a:rPr>
-              <a:t>(</a:t>
-            </a:r>
-            <a:br/>
-            <a:r>
-              <a:rPr>
-                <a:solidFill>
-                  <a:srgbClr val="003B4F"/>
-                </a:solidFill>
-                <a:latin typeface="Courier"/>
-              </a:rPr>
-              <a:t>      </a:t>
-            </a:r>
-            <a:r>
-              <a:rPr>
-                <a:solidFill>
-                  <a:srgbClr val="657422"/>
-                </a:solidFill>
-                <a:latin typeface="Courier"/>
-              </a:rPr>
-              <a:t>py_version =</a:t>
-            </a:r>
-            <a:r>
-              <a:rPr>
-                <a:solidFill>
-                  <a:srgbClr val="003B4F"/>
-                </a:solidFill>
-                <a:latin typeface="Courier"/>
-              </a:rPr>
-              <a:t> </a:t>
-            </a:r>
-            <a:r>
-              <a:rPr>
-                <a:solidFill>
-                  <a:srgbClr val="20794D"/>
-                </a:solidFill>
-                <a:latin typeface="Courier"/>
-              </a:rPr>
-              <a:t>"3.13"</a:t>
-            </a:r>
-            <a:r>
-              <a:rPr>
-                <a:solidFill>
-                  <a:srgbClr val="003B4F"/>
-                </a:solidFill>
-                <a:latin typeface="Courier"/>
-              </a:rPr>
-              <a:t>, </a:t>
-            </a:r>
-            <a:br/>
-            <a:r>
-              <a:rPr>
-                <a:solidFill>
-                  <a:srgbClr val="003B4F"/>
-                </a:solidFill>
-                <a:latin typeface="Courier"/>
-              </a:rPr>
-              <a:t>      </a:t>
-            </a:r>
-            <a:r>
-              <a:rPr>
-                <a:solidFill>
-                  <a:srgbClr val="657422"/>
-                </a:solidFill>
-                <a:latin typeface="Courier"/>
-              </a:rPr>
-              <a:t>py_pkgs =</a:t>
-            </a:r>
-            <a:r>
-              <a:rPr>
-                <a:solidFill>
-                  <a:srgbClr val="003B4F"/>
-                </a:solidFill>
-                <a:latin typeface="Courier"/>
-              </a:rPr>
-              <a:t> </a:t>
-            </a:r>
-            <a:r>
-              <a:rPr>
-                <a:solidFill>
-                  <a:srgbClr val="4758AB"/>
-                </a:solidFill>
-                <a:latin typeface="Courier"/>
-              </a:rPr>
-              <a:t>c</a:t>
-            </a:r>
-            <a:r>
-              <a:rPr>
-                <a:solidFill>
-                  <a:srgbClr val="003B4F"/>
-                </a:solidFill>
-                <a:latin typeface="Courier"/>
-              </a:rPr>
-              <a:t>(</a:t>
-            </a:r>
-            <a:r>
-              <a:rPr>
-                <a:solidFill>
-                  <a:srgbClr val="20794D"/>
-                </a:solidFill>
-                <a:latin typeface="Courier"/>
-              </a:rPr>
-              <a:t>"polars"</a:t>
-            </a:r>
-            <a:r>
-              <a:rPr>
-                <a:solidFill>
-                  <a:srgbClr val="003B4F"/>
-                </a:solidFill>
-                <a:latin typeface="Courier"/>
-              </a:rPr>
-              <a:t>, </a:t>
-            </a:r>
-            <a:r>
-              <a:rPr>
-                <a:solidFill>
-                  <a:srgbClr val="20794D"/>
-                </a:solidFill>
-                <a:latin typeface="Courier"/>
-              </a:rPr>
-              <a:t>"scikit-learn"</a:t>
-            </a:r>
-            <a:r>
-              <a:rPr>
-                <a:solidFill>
-                  <a:srgbClr val="003B4F"/>
-                </a:solidFill>
-                <a:latin typeface="Courier"/>
-              </a:rPr>
-              <a:t>)</a:t>
-            </a:r>
-            <a:br/>
-            <a:r>
-              <a:rPr>
-                <a:solidFill>
-                  <a:srgbClr val="003B4F"/>
-                </a:solidFill>
-                <a:latin typeface="Courier"/>
-              </a:rPr>
-              <a:t>    ),</a:t>
-            </a:r>
-            <a:br/>
-            <a:r>
-              <a:rPr>
-                <a:solidFill>
-                  <a:srgbClr val="003B4F"/>
-                </a:solidFill>
-                <a:latin typeface="Courier"/>
-              </a:rPr>
-              <a:t>    </a:t>
-            </a:r>
-            <a:r>
-              <a:rPr>
-                <a:solidFill>
-                  <a:srgbClr val="657422"/>
-                </a:solidFill>
-                <a:latin typeface="Courier"/>
-              </a:rPr>
-              <a:t>ide =</a:t>
-            </a:r>
-            <a:r>
-              <a:rPr>
-                <a:solidFill>
-                  <a:srgbClr val="003B4F"/>
-                </a:solidFill>
-                <a:latin typeface="Courier"/>
-              </a:rPr>
-              <a:t> </a:t>
-            </a:r>
-            <a:r>
-              <a:rPr>
-                <a:solidFill>
-                  <a:srgbClr val="20794D"/>
-                </a:solidFill>
-                <a:latin typeface="Courier"/>
-              </a:rPr>
-              <a:t>"none"</a:t>
-            </a:r>
-            <a:r>
-              <a:rPr>
-                <a:solidFill>
-                  <a:srgbClr val="003B4F"/>
-                </a:solidFill>
-                <a:latin typeface="Courier"/>
-              </a:rPr>
-              <a:t>,</a:t>
-            </a:r>
-            <a:br/>
-            <a:r>
-              <a:rPr>
-                <a:solidFill>
-                  <a:srgbClr val="003B4F"/>
-                </a:solidFill>
-                <a:latin typeface="Courier"/>
-              </a:rPr>
-              <a:t>    </a:t>
-            </a:r>
-            <a:r>
-              <a:rPr>
-                <a:solidFill>
-                  <a:srgbClr val="657422"/>
-                </a:solidFill>
-                <a:latin typeface="Courier"/>
-              </a:rPr>
-              <a:t>project_path =</a:t>
-            </a:r>
-            <a:r>
-              <a:rPr>
-                <a:solidFill>
-                  <a:srgbClr val="003B4F"/>
-                </a:solidFill>
-                <a:latin typeface="Courier"/>
-              </a:rPr>
-              <a:t> </a:t>
-            </a:r>
-            <a:r>
-              <a:rPr>
-                <a:solidFill>
-                  <a:srgbClr val="20794D"/>
-                </a:solidFill>
-                <a:latin typeface="Courier"/>
-              </a:rPr>
-              <a:t>"."</a:t>
-            </a:r>
-            <a:r>
-              <a:rPr>
-                <a:solidFill>
-                  <a:srgbClr val="003B4F"/>
-                </a:solidFill>
-                <a:latin typeface="Courier"/>
-              </a:rPr>
-              <a:t>,</a:t>
-            </a:r>
-            <a:br/>
-            <a:r>
-              <a:rPr>
-                <a:solidFill>
-                  <a:srgbClr val="003B4F"/>
-                </a:solidFill>
-                <a:latin typeface="Courier"/>
-              </a:rPr>
-              <a:t>    </a:t>
-            </a:r>
-            <a:r>
-              <a:rPr>
-                <a:solidFill>
-                  <a:srgbClr val="657422"/>
-                </a:solidFill>
-                <a:latin typeface="Courier"/>
-              </a:rPr>
-              <a:t>overwrite =</a:t>
-            </a:r>
-            <a:r>
-              <a:rPr>
-                <a:solidFill>
-                  <a:srgbClr val="003B4F"/>
-                </a:solidFill>
-                <a:latin typeface="Courier"/>
-              </a:rPr>
-              <a:t> </a:t>
-            </a:r>
-            <a:r>
-              <a:rPr>
-                <a:solidFill>
-                  <a:srgbClr val="8F5902"/>
-                </a:solidFill>
-                <a:latin typeface="Courier"/>
-              </a:rPr>
-              <a:t>TRUE</a:t>
-            </a:r>
-            <a:r>
-              <a:rPr>
-                <a:solidFill>
-                  <a:srgbClr val="003B4F"/>
-                </a:solidFill>
-                <a:latin typeface="Courier"/>
-              </a:rPr>
-              <a:t>)</a:t>
-            </a:r>
-          </a:p>
-          <a:p>
-            <a:pPr lvl="0"/>
-            <a:r>
-              <a:rPr/>
-              <a:t>Julia: use </a:t>
-            </a:r>
-            <a:r>
-              <a:rPr>
-                <a:latin typeface="Courier"/>
-              </a:rPr>
-              <a:t>jl_conf = list(jl_version = "1.10", jl_pkgs = c(...))</a:t>
-            </a:r>
-          </a:p>
-          <a:p>
-            <a:pPr lvl="0"/>
-            <a:r>
-              <a:rPr/>
-              <a:t>See: </a:t>
+              <a:rPr/>
+              <a:t>Basics: </a:t>
+            </a:r>
+            <a:r>
+              <a:rPr>
+                <a:latin typeface="Courier"/>
+              </a:rPr>
+              <a:t>scripts/nix_expressions/01_rix_intro/</a:t>
+            </a:r>
+          </a:p>
+          <a:p>
+            <a:pPr lvl="0"/>
+            <a:r>
+              <a:rPr/>
+              <a:t>Native VS Code/Positron on Windows: </a:t>
             </a:r>
             <a:r>
               <a:rPr>
                 <a:latin typeface="Courier"/>
               </a:rPr>
               <a:t>scripts/nix_expressions/02_native_positron_example/</a:t>
+            </a:r>
+          </a:p>
+          <a:p>
+            <a:pPr lvl="0"/>
+            <a:r>
+              <a:rPr/>
+              <a:t>Nix and </a:t>
+            </a:r>
+            <a:r>
+              <a:rPr>
+                <a:latin typeface="Courier"/>
+              </a:rPr>
+              <a:t>{targets}</a:t>
+            </a:r>
+            <a:r>
+              <a:rPr/>
+              <a:t>: </a:t>
+            </a:r>
+            <a:r>
+              <a:rPr>
+                <a:latin typeface="Courier"/>
+              </a:rPr>
+              <a:t>scripts/nix_expressions/03_nix_targets_pipeline</a:t>
+            </a:r>
+          </a:p>
+          <a:p>
+            <a:pPr lvl="0"/>
+            <a:r>
+              <a:rPr/>
+              <a:t>Nix and Docker: </a:t>
+            </a:r>
+            <a:r>
+              <a:rPr>
+                <a:latin typeface="Courier"/>
+              </a:rPr>
+              <a:t>scripts/nix_expressions/04_docker/</a:t>
+            </a:r>
+          </a:p>
+          <a:p>
+            <a:pPr lvl="0"/>
+            <a:r>
+              <a:rPr/>
+              <a:t>Nix and </a:t>
+            </a:r>
+            <a:r>
+              <a:rPr>
+                <a:latin typeface="Courier"/>
+              </a:rPr>
+              <a:t>{shiny}</a:t>
+            </a:r>
+            <a:r>
+              <a:rPr/>
+              <a:t>: </a:t>
+            </a:r>
+            <a:r>
+              <a:rPr>
+                <a:latin typeface="Courier"/>
+              </a:rPr>
+              <a:t>scripts/nix_expressions/05_shiny</a:t>
+            </a:r>
+          </a:p>
+          <a:p>
+            <a:pPr lvl="0"/>
+            <a:r>
+              <a:rPr/>
+              <a:t>GitHub Actions: </a:t>
+            </a:r>
+            <a:r>
+              <a:rPr>
+                <a:hlinkClick r:id="rId2"/>
+              </a:rPr>
+              <a:t>see here</a:t>
             </a:r>
           </a:p>
         </p:txBody>
@@ -4562,7 +4623,13 @@
             </a:pPr>
             <a:r>
               <a:rPr/>
-              <a:t>Demo</a:t>
+              <a:t>Polyglot pipelines with </a:t>
+            </a:r>
+            <a:r>
+              <a:rPr>
+                <a:latin typeface="Courier"/>
+              </a:rPr>
+              <a:t>{rixpress}</a:t>
             </a:r>
           </a:p>
         </p:txBody>
@@ -4584,99 +4651,59 @@
           <a:p>
             <a:pPr lvl="0"/>
             <a:r>
-              <a:rPr/>
-              <a:t>Basics: </a:t>
-            </a:r>
-            <a:r>
-              <a:rPr>
-                <a:latin typeface="Courier"/>
-              </a:rPr>
-              <a:t>scripts/nix_expressions/01_rix_intro/</a:t>
-            </a:r>
-          </a:p>
-          <a:p>
-            <a:pPr lvl="0"/>
-            <a:r>
-              <a:rPr/>
-              <a:t>Native VS Code/Positron on Windows: </a:t>
-            </a:r>
-            <a:r>
-              <a:rPr>
-                <a:latin typeface="Courier"/>
-              </a:rPr>
-              <a:t>scripts/nix_expressions/02_native_positron_example/</a:t>
-            </a:r>
-          </a:p>
-          <a:p>
-            <a:pPr lvl="0"/>
-            <a:r>
-              <a:rPr/>
-              <a:t>Nix and </a:t>
-            </a:r>
-            <a:r>
-              <a:rPr>
-                <a:latin typeface="Courier"/>
-              </a:rPr>
-              <a:t>{targets}</a:t>
-            </a:r>
-            <a:r>
-              <a:rPr/>
-              <a:t>: </a:t>
-            </a:r>
-            <a:r>
-              <a:rPr>
-                <a:latin typeface="Courier"/>
-              </a:rPr>
-              <a:t>scripts/nix_expressions/03_nix_targets_pipeline</a:t>
-            </a:r>
-          </a:p>
-          <a:p>
-            <a:pPr lvl="0"/>
-            <a:r>
-              <a:rPr/>
-              <a:t>Nix and Docker: </a:t>
-            </a:r>
-            <a:r>
-              <a:rPr>
-                <a:latin typeface="Courier"/>
-              </a:rPr>
-              <a:t>scripts/nix_expressions/04_docker/</a:t>
-            </a:r>
-          </a:p>
-          <a:p>
-            <a:pPr lvl="0"/>
-            <a:r>
-              <a:rPr/>
-              <a:t>Nix and </a:t>
-            </a:r>
-            <a:r>
-              <a:rPr>
-                <a:latin typeface="Courier"/>
-              </a:rPr>
-              <a:t>{shiny}</a:t>
-            </a:r>
-            <a:r>
-              <a:rPr/>
-              <a:t>: </a:t>
-            </a:r>
-            <a:r>
-              <a:rPr>
-                <a:latin typeface="Courier"/>
-              </a:rPr>
-              <a:t>scripts/nix_expressions/05_shiny</a:t>
-            </a:r>
-          </a:p>
-          <a:p>
-            <a:pPr lvl="0"/>
-            <a:r>
-              <a:rPr/>
-              <a:t>GitHub Actions: </a:t>
-            </a:r>
-            <a:r>
-              <a:rPr>
-                <a:hlinkClick r:id="rId2"/>
-              </a:rPr>
-              <a:t>see here</a:t>
+              <a:rPr>
+                <a:latin typeface="Courier"/>
+              </a:rPr>
+              <a:t>{rixpress}</a:t>
+            </a:r>
+            <a:r>
+              <a:rPr/>
+              <a:t> allows chaining processing steps in R, Python and Julia</a:t>
+            </a:r>
+          </a:p>
+          <a:p>
+            <a:pPr lvl="0"/>
+            <a:r>
+              <a:rPr/>
+              <a:t>Uses </a:t>
+            </a:r>
+            <a:r>
+              <a:rPr>
+                <a:latin typeface="Courier"/>
+              </a:rPr>
+              <a:t>{rix}</a:t>
+            </a:r>
+            <a:r>
+              <a:rPr/>
+              <a:t> to create a reproducible (via Nix) execution environment for the pipeline</a:t>
+            </a:r>
+          </a:p>
+          <a:p>
+            <a:pPr lvl="0"/>
+            <a:r>
+              <a:rPr/>
+              <a:t>Each pipeline step is a </a:t>
+            </a:r>
+            <a:r>
+              <a:rPr b="1"/>
+              <a:t>Nix derivation</a:t>
+            </a:r>
+          </a:p>
+          <a:p>
+            <a:pPr lvl="0"/>
+            <a:r>
+              <a:rPr/>
+              <a:t>Data transfer: automatic via </a:t>
+            </a:r>
+            <a:r>
+              <a:rPr>
+                <a:latin typeface="Courier"/>
+              </a:rPr>
+              <a:t>reticulate</a:t>
+            </a:r>
+            <a:r>
+              <a:rPr/>
+              <a:t> or universal format (JSON)</a:t>
             </a:r>
           </a:p>
         </p:txBody>
@@ -4723,13 +4750,7 @@
             </a:pPr>
             <a:r>
               <a:rPr/>
-              <a:t>Polyglot pipelines with </a:t>
-            </a:r>
-            <a:r>
-              <a:rPr>
-                <a:latin typeface="Courier"/>
-              </a:rPr>
-              <a:t>{rixpress}</a:t>
+              <a:t>An example of a polyglot pipeline</a:t>
             </a:r>
           </a:p>
         </p:txBody>
@@ -4749,61 +4770,422 @@
           <a:bodyPr/>
           <a:lstStyle/>
           <a:p>
-            <a:pPr lvl="0"/>
-            <a:r>
-              <a:rPr>
-                <a:latin typeface="Courier"/>
-              </a:rPr>
-              <a:t>{rixpress}</a:t>
-            </a:r>
-            <a:r>
-              <a:rPr/>
-              <a:t> allows chaining processing steps in R, Python and Julia</a:t>
-            </a:r>
-          </a:p>
-          <a:p>
-            <a:pPr lvl="0"/>
-            <a:r>
-              <a:rPr/>
-              <a:t>Uses </a:t>
-            </a:r>
-            <a:r>
-              <a:rPr>
-                <a:latin typeface="Courier"/>
-              </a:rPr>
-              <a:t>{rix}</a:t>
-            </a:r>
-            <a:r>
-              <a:rPr/>
-              <a:t> to create a reproducible (via Nix) execution environment for the pipeline</a:t>
-            </a:r>
-          </a:p>
-          <a:p>
-            <a:pPr lvl="0"/>
-            <a:r>
-              <a:rPr/>
-              <a:t>Each pipeline step is a </a:t>
-            </a:r>
-            <a:r>
-              <a:rPr b="1"/>
-              <a:t>Nix derivation</a:t>
-            </a:r>
-          </a:p>
-          <a:p>
-            <a:pPr lvl="0"/>
-            <a:r>
-              <a:rPr/>
-              <a:t>Data transfer: automatic via </a:t>
-            </a:r>
-            <a:r>
-              <a:rPr>
-                <a:latin typeface="Courier"/>
-              </a:rPr>
-              <a:t>reticulate</a:t>
-            </a:r>
-            <a:r>
-              <a:rPr/>
-              <a:t> or universal format (JSON)</a:t>
+            <a:pPr lvl="0" indent="0">
+              <a:buNone/>
+            </a:pPr>
+            <a:r>
+              <a:rPr>
+                <a:solidFill>
+                  <a:srgbClr val="4758AB"/>
+                </a:solidFill>
+                <a:latin typeface="Courier"/>
+              </a:rPr>
+              <a:t>list</a:t>
+            </a:r>
+            <a:r>
+              <a:rPr>
+                <a:solidFill>
+                  <a:srgbClr val="003B4F"/>
+                </a:solidFill>
+                <a:latin typeface="Courier"/>
+              </a:rPr>
+              <a:t>(</a:t>
+            </a:r>
+            <a:br/>
+            <a:r>
+              <a:rPr>
+                <a:solidFill>
+                  <a:srgbClr val="003B4F"/>
+                </a:solidFill>
+                <a:latin typeface="Courier"/>
+              </a:rPr>
+              <a:t>  </a:t>
+            </a:r>
+            <a:r>
+              <a:rPr>
+                <a:solidFill>
+                  <a:srgbClr val="4758AB"/>
+                </a:solidFill>
+                <a:latin typeface="Courier"/>
+              </a:rPr>
+              <a:t>rxp_py_file</a:t>
+            </a:r>
+            <a:r>
+              <a:rPr>
+                <a:solidFill>
+                  <a:srgbClr val="003B4F"/>
+                </a:solidFill>
+                <a:latin typeface="Courier"/>
+              </a:rPr>
+              <a:t>(…),    </a:t>
+            </a:r>
+            <a:r>
+              <a:rPr>
+                <a:solidFill>
+                  <a:srgbClr val="5E5E5E"/>
+                </a:solidFill>
+                <a:latin typeface="Courier"/>
+              </a:rPr>
+              <a:t># Read a CSV with Python</a:t>
+            </a:r>
+            <a:br/>
+            <a:r>
+              <a:rPr>
+                <a:solidFill>
+                  <a:srgbClr val="003B4F"/>
+                </a:solidFill>
+                <a:latin typeface="Courier"/>
+              </a:rPr>
+              <a:t>  </a:t>
+            </a:r>
+            <a:r>
+              <a:rPr>
+                <a:solidFill>
+                  <a:srgbClr val="4758AB"/>
+                </a:solidFill>
+                <a:latin typeface="Courier"/>
+              </a:rPr>
+              <a:t>rxp_py</a:t>
+            </a:r>
+            <a:r>
+              <a:rPr>
+                <a:solidFill>
+                  <a:srgbClr val="003B4F"/>
+                </a:solidFill>
+                <a:latin typeface="Courier"/>
+              </a:rPr>
+              <a:t>(…),         </a:t>
+            </a:r>
+            <a:r>
+              <a:rPr>
+                <a:solidFill>
+                  <a:srgbClr val="5E5E5E"/>
+                </a:solidFill>
+                <a:latin typeface="Courier"/>
+              </a:rPr>
+              <a:t># Filter with Polars</a:t>
+            </a:r>
+            <a:br/>
+            <a:r>
+              <a:rPr>
+                <a:solidFill>
+                  <a:srgbClr val="003B4F"/>
+                </a:solidFill>
+                <a:latin typeface="Courier"/>
+              </a:rPr>
+              <a:t>  </a:t>
+            </a:r>
+            <a:r>
+              <a:rPr>
+                <a:solidFill>
+                  <a:srgbClr val="4758AB"/>
+                </a:solidFill>
+                <a:latin typeface="Courier"/>
+              </a:rPr>
+              <a:t>rxp_py2r</a:t>
+            </a:r>
+            <a:r>
+              <a:rPr>
+                <a:solidFill>
+                  <a:srgbClr val="003B4F"/>
+                </a:solidFill>
+                <a:latin typeface="Courier"/>
+              </a:rPr>
+              <a:t>(…),       </a:t>
+            </a:r>
+            <a:r>
+              <a:rPr>
+                <a:solidFill>
+                  <a:srgbClr val="5E5E5E"/>
+                </a:solidFill>
+                <a:latin typeface="Courier"/>
+              </a:rPr>
+              <a:t># Python → R transfer</a:t>
+            </a:r>
+            <a:br/>
+            <a:r>
+              <a:rPr>
+                <a:solidFill>
+                  <a:srgbClr val="003B4F"/>
+                </a:solidFill>
+                <a:latin typeface="Courier"/>
+              </a:rPr>
+              <a:t>  </a:t>
+            </a:r>
+            <a:r>
+              <a:rPr>
+                <a:solidFill>
+                  <a:srgbClr val="4758AB"/>
+                </a:solidFill>
+                <a:latin typeface="Courier"/>
+              </a:rPr>
+              <a:t>rxp_r</a:t>
+            </a:r>
+            <a:r>
+              <a:rPr>
+                <a:solidFill>
+                  <a:srgbClr val="003B4F"/>
+                </a:solidFill>
+                <a:latin typeface="Courier"/>
+              </a:rPr>
+              <a:t>(…),          </a:t>
+            </a:r>
+            <a:r>
+              <a:rPr>
+                <a:solidFill>
+                  <a:srgbClr val="5E5E5E"/>
+                </a:solidFill>
+                <a:latin typeface="Courier"/>
+              </a:rPr>
+              <a:t># Transformation in R</a:t>
+            </a:r>
+            <a:br/>
+            <a:r>
+              <a:rPr>
+                <a:solidFill>
+                  <a:srgbClr val="003B4F"/>
+                </a:solidFill>
+                <a:latin typeface="Courier"/>
+              </a:rPr>
+              <a:t>  </a:t>
+            </a:r>
+            <a:r>
+              <a:rPr>
+                <a:solidFill>
+                  <a:srgbClr val="4758AB"/>
+                </a:solidFill>
+                <a:latin typeface="Courier"/>
+              </a:rPr>
+              <a:t>rxp_r2py</a:t>
+            </a:r>
+            <a:r>
+              <a:rPr>
+                <a:solidFill>
+                  <a:srgbClr val="003B4F"/>
+                </a:solidFill>
+                <a:latin typeface="Courier"/>
+              </a:rPr>
+              <a:t>(…),       </a:t>
+            </a:r>
+            <a:r>
+              <a:rPr>
+                <a:solidFill>
+                  <a:srgbClr val="5E5E5E"/>
+                </a:solidFill>
+                <a:latin typeface="Courier"/>
+              </a:rPr>
+              <a:t># R → Python transfer</a:t>
+            </a:r>
+            <a:br/>
+            <a:r>
+              <a:rPr>
+                <a:solidFill>
+                  <a:srgbClr val="003B4F"/>
+                </a:solidFill>
+                <a:latin typeface="Courier"/>
+              </a:rPr>
+              <a:t>  </a:t>
+            </a:r>
+            <a:r>
+              <a:rPr>
+                <a:solidFill>
+                  <a:srgbClr val="4758AB"/>
+                </a:solidFill>
+                <a:latin typeface="Courier"/>
+              </a:rPr>
+              <a:t>rxp_py</a:t>
+            </a:r>
+            <a:r>
+              <a:rPr>
+                <a:solidFill>
+                  <a:srgbClr val="003B4F"/>
+                </a:solidFill>
+                <a:latin typeface="Courier"/>
+              </a:rPr>
+              <a:t>(…),         </a:t>
+            </a:r>
+            <a:r>
+              <a:rPr>
+                <a:solidFill>
+                  <a:srgbClr val="5E5E5E"/>
+                </a:solidFill>
+                <a:latin typeface="Courier"/>
+              </a:rPr>
+              <a:t># Another Python step</a:t>
+            </a:r>
+            <a:br/>
+            <a:r>
+              <a:rPr>
+                <a:solidFill>
+                  <a:srgbClr val="003B4F"/>
+                </a:solidFill>
+                <a:latin typeface="Courier"/>
+              </a:rPr>
+              <a:t>  </a:t>
+            </a:r>
+            <a:r>
+              <a:rPr>
+                <a:solidFill>
+                  <a:srgbClr val="4758AB"/>
+                </a:solidFill>
+                <a:latin typeface="Courier"/>
+              </a:rPr>
+              <a:t>rxp_py2r</a:t>
+            </a:r>
+            <a:r>
+              <a:rPr>
+                <a:solidFill>
+                  <a:srgbClr val="003B4F"/>
+                </a:solidFill>
+                <a:latin typeface="Courier"/>
+              </a:rPr>
+              <a:t>(…),       </a:t>
+            </a:r>
+            <a:r>
+              <a:rPr>
+                <a:solidFill>
+                  <a:srgbClr val="5E5E5E"/>
+                </a:solidFill>
+                <a:latin typeface="Courier"/>
+              </a:rPr>
+              <a:t># Back to R</a:t>
+            </a:r>
+            <a:br/>
+            <a:r>
+              <a:rPr>
+                <a:solidFill>
+                  <a:srgbClr val="003B4F"/>
+                </a:solidFill>
+                <a:latin typeface="Courier"/>
+              </a:rPr>
+              <a:t>  </a:t>
+            </a:r>
+            <a:r>
+              <a:rPr>
+                <a:solidFill>
+                  <a:srgbClr val="4758AB"/>
+                </a:solidFill>
+                <a:latin typeface="Courier"/>
+              </a:rPr>
+              <a:t>rxp_r</a:t>
+            </a:r>
+            <a:r>
+              <a:rPr>
+                <a:solidFill>
+                  <a:srgbClr val="003B4F"/>
+                </a:solidFill>
+                <a:latin typeface="Courier"/>
+              </a:rPr>
+              <a:t>(…)           </a:t>
+            </a:r>
+            <a:r>
+              <a:rPr>
+                <a:solidFill>
+                  <a:srgbClr val="5E5E5E"/>
+                </a:solidFill>
+                <a:latin typeface="Courier"/>
+              </a:rPr>
+              <a:t># Final step</a:t>
+            </a:r>
+            <a:br/>
+            <a:r>
+              <a:rPr>
+                <a:solidFill>
+                  <a:srgbClr val="003B4F"/>
+                </a:solidFill>
+                <a:latin typeface="Courier"/>
+              </a:rPr>
+              <a:t>) </a:t>
+            </a:r>
+            <a:r>
+              <a:rPr>
+                <a:solidFill>
+                  <a:srgbClr val="5E5E5E"/>
+                </a:solidFill>
+                <a:latin typeface="Courier"/>
+              </a:rPr>
+              <a:t>|&gt;</a:t>
+            </a:r>
+            <a:r>
+              <a:rPr>
+                <a:solidFill>
+                  <a:srgbClr val="003B4F"/>
+                </a:solidFill>
+                <a:latin typeface="Courier"/>
+              </a:rPr>
+              <a:t> </a:t>
+            </a:r>
+            <a:r>
+              <a:rPr>
+                <a:solidFill>
+                  <a:srgbClr val="4758AB"/>
+                </a:solidFill>
+                <a:latin typeface="Courier"/>
+              </a:rPr>
+              <a:t>rixpress</a:t>
+            </a:r>
+            <a:r>
+              <a:rPr>
+                <a:solidFill>
+                  <a:srgbClr val="003B4F"/>
+                </a:solidFill>
+                <a:latin typeface="Courier"/>
+              </a:rPr>
+              <a:t>()</a:t>
+            </a:r>
+          </a:p>
+          <a:p>
+            <a:pPr lvl="0"/>
+            <a:r>
+              <a:rPr/>
+              <a:t>Each step is named and typed (</a:t>
+            </a:r>
+            <a:r>
+              <a:rPr>
+                <a:latin typeface="Courier"/>
+              </a:rPr>
+              <a:t>py</a:t>
+            </a:r>
+            <a:r>
+              <a:rPr/>
+              <a:t>, </a:t>
+            </a:r>
+            <a:r>
+              <a:rPr>
+                <a:latin typeface="Courier"/>
+              </a:rPr>
+              <a:t>r</a:t>
+            </a:r>
+            <a:r>
+              <a:rPr/>
+              <a:t>, </a:t>
+            </a:r>
+            <a:r>
+              <a:rPr>
+                <a:latin typeface="Courier"/>
+              </a:rPr>
+              <a:t>r2py</a:t>
+            </a:r>
+            <a:r>
+              <a:rPr/>
+              <a:t>, etc.)</a:t>
+            </a:r>
+          </a:p>
+          <a:p>
+            <a:pPr lvl="0"/>
+            <a:r>
+              <a:rPr/>
+              <a:t>Ability to add files (</a:t>
+            </a:r>
+            <a:r>
+              <a:rPr>
+                <a:latin typeface="Courier"/>
+              </a:rPr>
+              <a:t>functions.R</a:t>
+            </a:r>
+            <a:r>
+              <a:rPr/>
+              <a:t>, images…)</a:t>
             </a:r>
           </a:p>
         </p:txBody>
@@ -4850,7 +5232,7 @@
             </a:pPr>
             <a:r>
               <a:rPr/>
-              <a:t>An example of a polyglot pipeline</a:t>
+              <a:t>Demo</a:t>
             </a:r>
           </a:p>
         </p:txBody>
@@ -4870,422 +5252,16 @@
           <a:bodyPr/>
           <a:lstStyle/>
           <a:p>
-            <a:pPr lvl="0" indent="0">
-              <a:buNone/>
-            </a:pPr>
-            <a:r>
-              <a:rPr>
-                <a:solidFill>
-                  <a:srgbClr val="4758AB"/>
-                </a:solidFill>
-                <a:latin typeface="Courier"/>
-              </a:rPr>
-              <a:t>list</a:t>
-            </a:r>
-            <a:r>
-              <a:rPr>
-                <a:solidFill>
-                  <a:srgbClr val="003B4F"/>
-                </a:solidFill>
-                <a:latin typeface="Courier"/>
-              </a:rPr>
-              <a:t>(</a:t>
-            </a:r>
-            <a:br/>
-            <a:r>
-              <a:rPr>
-                <a:solidFill>
-                  <a:srgbClr val="003B4F"/>
-                </a:solidFill>
-                <a:latin typeface="Courier"/>
-              </a:rPr>
-              <a:t>  </a:t>
-            </a:r>
-            <a:r>
-              <a:rPr>
-                <a:solidFill>
-                  <a:srgbClr val="4758AB"/>
-                </a:solidFill>
-                <a:latin typeface="Courier"/>
-              </a:rPr>
-              <a:t>rxp_py_file</a:t>
-            </a:r>
-            <a:r>
-              <a:rPr>
-                <a:solidFill>
-                  <a:srgbClr val="003B4F"/>
-                </a:solidFill>
-                <a:latin typeface="Courier"/>
-              </a:rPr>
-              <a:t>(…),    </a:t>
-            </a:r>
-            <a:r>
-              <a:rPr>
-                <a:solidFill>
-                  <a:srgbClr val="5E5E5E"/>
-                </a:solidFill>
-                <a:latin typeface="Courier"/>
-              </a:rPr>
-              <a:t># Read a CSV with Python</a:t>
-            </a:r>
-            <a:br/>
-            <a:r>
-              <a:rPr>
-                <a:solidFill>
-                  <a:srgbClr val="003B4F"/>
-                </a:solidFill>
-                <a:latin typeface="Courier"/>
-              </a:rPr>
-              <a:t>  </a:t>
-            </a:r>
-            <a:r>
-              <a:rPr>
-                <a:solidFill>
-                  <a:srgbClr val="4758AB"/>
-                </a:solidFill>
-                <a:latin typeface="Courier"/>
-              </a:rPr>
-              <a:t>rxp_py</a:t>
-            </a:r>
-            <a:r>
-              <a:rPr>
-                <a:solidFill>
-                  <a:srgbClr val="003B4F"/>
-                </a:solidFill>
-                <a:latin typeface="Courier"/>
-              </a:rPr>
-              <a:t>(…),         </a:t>
-            </a:r>
-            <a:r>
-              <a:rPr>
-                <a:solidFill>
-                  <a:srgbClr val="5E5E5E"/>
-                </a:solidFill>
-                <a:latin typeface="Courier"/>
-              </a:rPr>
-              <a:t># Filter with Polars</a:t>
-            </a:r>
-            <a:br/>
-            <a:r>
-              <a:rPr>
-                <a:solidFill>
-                  <a:srgbClr val="003B4F"/>
-                </a:solidFill>
-                <a:latin typeface="Courier"/>
-              </a:rPr>
-              <a:t>  </a:t>
-            </a:r>
-            <a:r>
-              <a:rPr>
-                <a:solidFill>
-                  <a:srgbClr val="4758AB"/>
-                </a:solidFill>
-                <a:latin typeface="Courier"/>
-              </a:rPr>
-              <a:t>rxp_py2r</a:t>
-            </a:r>
-            <a:r>
-              <a:rPr>
-                <a:solidFill>
-                  <a:srgbClr val="003B4F"/>
-                </a:solidFill>
-                <a:latin typeface="Courier"/>
-              </a:rPr>
-              <a:t>(…),       </a:t>
-            </a:r>
-            <a:r>
-              <a:rPr>
-                <a:solidFill>
-                  <a:srgbClr val="5E5E5E"/>
-                </a:solidFill>
-                <a:latin typeface="Courier"/>
-              </a:rPr>
-              <a:t># Python → R transfer</a:t>
-            </a:r>
-            <a:br/>
-            <a:r>
-              <a:rPr>
-                <a:solidFill>
-                  <a:srgbClr val="003B4F"/>
-                </a:solidFill>
-                <a:latin typeface="Courier"/>
-              </a:rPr>
-              <a:t>  </a:t>
-            </a:r>
-            <a:r>
-              <a:rPr>
-                <a:solidFill>
-                  <a:srgbClr val="4758AB"/>
-                </a:solidFill>
-                <a:latin typeface="Courier"/>
-              </a:rPr>
-              <a:t>rxp_r</a:t>
-            </a:r>
-            <a:r>
-              <a:rPr>
-                <a:solidFill>
-                  <a:srgbClr val="003B4F"/>
-                </a:solidFill>
-                <a:latin typeface="Courier"/>
-              </a:rPr>
-              <a:t>(…),          </a:t>
-            </a:r>
-            <a:r>
-              <a:rPr>
-                <a:solidFill>
-                  <a:srgbClr val="5E5E5E"/>
-                </a:solidFill>
-                <a:latin typeface="Courier"/>
-              </a:rPr>
-              <a:t># Transformation in R</a:t>
-            </a:r>
-            <a:br/>
-            <a:r>
-              <a:rPr>
-                <a:solidFill>
-                  <a:srgbClr val="003B4F"/>
-                </a:solidFill>
-                <a:latin typeface="Courier"/>
-              </a:rPr>
-              <a:t>  </a:t>
-            </a:r>
-            <a:r>
-              <a:rPr>
-                <a:solidFill>
-                  <a:srgbClr val="4758AB"/>
-                </a:solidFill>
-                <a:latin typeface="Courier"/>
-              </a:rPr>
-              <a:t>rxp_r2py</a:t>
-            </a:r>
-            <a:r>
-              <a:rPr>
-                <a:solidFill>
-                  <a:srgbClr val="003B4F"/>
-                </a:solidFill>
-                <a:latin typeface="Courier"/>
-              </a:rPr>
-              <a:t>(…),       </a:t>
-            </a:r>
-            <a:r>
-              <a:rPr>
-                <a:solidFill>
-                  <a:srgbClr val="5E5E5E"/>
-                </a:solidFill>
-                <a:latin typeface="Courier"/>
-              </a:rPr>
-              <a:t># R → Python transfer</a:t>
-            </a:r>
-            <a:br/>
-            <a:r>
-              <a:rPr>
-                <a:solidFill>
-                  <a:srgbClr val="003B4F"/>
-                </a:solidFill>
-                <a:latin typeface="Courier"/>
-              </a:rPr>
-              <a:t>  </a:t>
-            </a:r>
-            <a:r>
-              <a:rPr>
-                <a:solidFill>
-                  <a:srgbClr val="4758AB"/>
-                </a:solidFill>
-                <a:latin typeface="Courier"/>
-              </a:rPr>
-              <a:t>rxp_py</a:t>
-            </a:r>
-            <a:r>
-              <a:rPr>
-                <a:solidFill>
-                  <a:srgbClr val="003B4F"/>
-                </a:solidFill>
-                <a:latin typeface="Courier"/>
-              </a:rPr>
-              <a:t>(…),         </a:t>
-            </a:r>
-            <a:r>
-              <a:rPr>
-                <a:solidFill>
-                  <a:srgbClr val="5E5E5E"/>
-                </a:solidFill>
-                <a:latin typeface="Courier"/>
-              </a:rPr>
-              <a:t># Another Python step</a:t>
-            </a:r>
-            <a:br/>
-            <a:r>
-              <a:rPr>
-                <a:solidFill>
-                  <a:srgbClr val="003B4F"/>
-                </a:solidFill>
-                <a:latin typeface="Courier"/>
-              </a:rPr>
-              <a:t>  </a:t>
-            </a:r>
-            <a:r>
-              <a:rPr>
-                <a:solidFill>
-                  <a:srgbClr val="4758AB"/>
-                </a:solidFill>
-                <a:latin typeface="Courier"/>
-              </a:rPr>
-              <a:t>rxp_py2r</a:t>
-            </a:r>
-            <a:r>
-              <a:rPr>
-                <a:solidFill>
-                  <a:srgbClr val="003B4F"/>
-                </a:solidFill>
-                <a:latin typeface="Courier"/>
-              </a:rPr>
-              <a:t>(…),       </a:t>
-            </a:r>
-            <a:r>
-              <a:rPr>
-                <a:solidFill>
-                  <a:srgbClr val="5E5E5E"/>
-                </a:solidFill>
-                <a:latin typeface="Courier"/>
-              </a:rPr>
-              <a:t># Back to R</a:t>
-            </a:r>
-            <a:br/>
-            <a:r>
-              <a:rPr>
-                <a:solidFill>
-                  <a:srgbClr val="003B4F"/>
-                </a:solidFill>
-                <a:latin typeface="Courier"/>
-              </a:rPr>
-              <a:t>  </a:t>
-            </a:r>
-            <a:r>
-              <a:rPr>
-                <a:solidFill>
-                  <a:srgbClr val="4758AB"/>
-                </a:solidFill>
-                <a:latin typeface="Courier"/>
-              </a:rPr>
-              <a:t>rxp_r</a:t>
-            </a:r>
-            <a:r>
-              <a:rPr>
-                <a:solidFill>
-                  <a:srgbClr val="003B4F"/>
-                </a:solidFill>
-                <a:latin typeface="Courier"/>
-              </a:rPr>
-              <a:t>(…)           </a:t>
-            </a:r>
-            <a:r>
-              <a:rPr>
-                <a:solidFill>
-                  <a:srgbClr val="5E5E5E"/>
-                </a:solidFill>
-                <a:latin typeface="Courier"/>
-              </a:rPr>
-              <a:t># Final step</a:t>
-            </a:r>
-            <a:br/>
-            <a:r>
-              <a:rPr>
-                <a:solidFill>
-                  <a:srgbClr val="003B4F"/>
-                </a:solidFill>
-                <a:latin typeface="Courier"/>
-              </a:rPr>
-              <a:t>) </a:t>
-            </a:r>
-            <a:r>
-              <a:rPr>
-                <a:solidFill>
-                  <a:srgbClr val="5E5E5E"/>
-                </a:solidFill>
-                <a:latin typeface="Courier"/>
-              </a:rPr>
-              <a:t>|&gt;</a:t>
-            </a:r>
-            <a:r>
-              <a:rPr>
-                <a:solidFill>
-                  <a:srgbClr val="003B4F"/>
-                </a:solidFill>
-                <a:latin typeface="Courier"/>
-              </a:rPr>
-              <a:t> </a:t>
-            </a:r>
-            <a:r>
-              <a:rPr>
-                <a:solidFill>
-                  <a:srgbClr val="4758AB"/>
-                </a:solidFill>
-                <a:latin typeface="Courier"/>
-              </a:rPr>
-              <a:t>rixpress</a:t>
-            </a:r>
-            <a:r>
-              <a:rPr>
-                <a:solidFill>
-                  <a:srgbClr val="003B4F"/>
-                </a:solidFill>
-                <a:latin typeface="Courier"/>
-              </a:rPr>
-              <a:t>()</a:t>
-            </a:r>
-          </a:p>
-          <a:p>
-            <a:pPr lvl="0"/>
-            <a:r>
-              <a:rPr/>
-              <a:t>Each step is named and typed (</a:t>
-            </a:r>
-            <a:r>
-              <a:rPr>
-                <a:latin typeface="Courier"/>
-              </a:rPr>
-              <a:t>py</a:t>
-            </a:r>
-            <a:r>
-              <a:rPr/>
-              <a:t>, </a:t>
-            </a:r>
-            <a:r>
-              <a:rPr>
-                <a:latin typeface="Courier"/>
-              </a:rPr>
-              <a:t>r</a:t>
-            </a:r>
-            <a:r>
-              <a:rPr/>
-              <a:t>, </a:t>
-            </a:r>
-            <a:r>
-              <a:rPr>
-                <a:latin typeface="Courier"/>
-              </a:rPr>
-              <a:t>r2py</a:t>
-            </a:r>
-            <a:r>
-              <a:rPr/>
-              <a:t>, etc.)</a:t>
-            </a:r>
-          </a:p>
-          <a:p>
-            <a:pPr lvl="0"/>
-            <a:r>
-              <a:rPr/>
-              <a:t>Ability to add files (</a:t>
-            </a:r>
-            <a:r>
-              <a:rPr>
-                <a:latin typeface="Courier"/>
-              </a:rPr>
-              <a:t>functions.R</a:t>
-            </a:r>
-            <a:r>
-              <a:rPr/>
-              <a:t>, images…)</a:t>
+            <a:pPr lvl="0"/>
+            <a:r>
+              <a:rPr/>
+              <a:t>Basics: </a:t>
+            </a:r>
+            <a:r>
+              <a:rPr>
+                <a:latin typeface="Courier"/>
+              </a:rPr>
+              <a:t>scripts/rixpress_demo/</a:t>
             </a:r>
           </a:p>
         </p:txBody>
@@ -5332,7 +5308,7 @@
             </a:pPr>
             <a:r>
               <a:rPr/>
-              <a:t>Demo</a:t>
+              <a:t>To learn more about rixpress:</a:t>
             </a:r>
           </a:p>
         </p:txBody>
@@ -5354,14 +5330,28 @@
           <a:p>
             <a:pPr lvl="0"/>
             <a:r>
-              <a:rPr/>
-              <a:t>Basics: </a:t>
-            </a:r>
-            <a:r>
-              <a:rPr>
-                <a:latin typeface="Courier"/>
-              </a:rPr>
-              <a:t>scripts/rixpress_demo/</a:t>
+              <a:rPr>
+                <a:hlinkClick r:id="rId2"/>
+              </a:rPr>
+              <a:t>GitHub Repository</a:t>
+            </a:r>
+          </a:p>
+          <a:p>
+            <a:pPr lvl="0"/>
+            <a:r>
+              <a:rPr>
+                <a:hlinkClick r:id="rId3"/>
+              </a:rPr>
+              <a:t>Website</a:t>
+            </a:r>
+          </a:p>
+          <a:p>
+            <a:pPr lvl="0"/>
+            <a:r>
+              <a:rPr>
+                <a:hlinkClick r:id="rId4"/>
+              </a:rPr>
+              <a:t>Repository of demos</a:t>
             </a:r>
           </a:p>
         </p:txBody>
@@ -5408,7 +5398,7 @@
             </a:pPr>
             <a:r>
               <a:rPr/>
-              <a:t>To learn more about rixpress:</a:t>
+              <a:t>T, a new DSL for polyglot data science</a:t>
             </a:r>
           </a:p>
         </p:txBody>
@@ -5430,28 +5420,29 @@
           <a:p>
             <a:pPr lvl="0"/>
             <a:r>
-              <a:rPr>
-                <a:hlinkClick r:id="rId2"/>
-              </a:rPr>
-              <a:t>GitHub Repository</a:t>
-            </a:r>
-          </a:p>
-          <a:p>
-            <a:pPr lvl="0"/>
-            <a:r>
-              <a:rPr>
-                <a:hlinkClick r:id="rId3"/>
-              </a:rPr>
-              <a:t>Website</a:t>
-            </a:r>
-          </a:p>
-          <a:p>
-            <a:pPr lvl="0"/>
-            <a:r>
-              <a:rPr>
-                <a:hlinkClick r:id="rId4"/>
-              </a:rPr>
-              <a:t>Repository of demos</a:t>
+              <a:rPr/>
+              <a:t>Reproducibility is often an afterthought, with ad-hoc tools</a:t>
+            </a:r>
+          </a:p>
+          <a:p>
+            <a:pPr lvl="0"/>
+            <a:r>
+              <a:rPr/>
+              <a:t>Nix eases the pain, but humans have to play ball! (biggest challenge)</a:t>
+            </a:r>
+          </a:p>
+          <a:p>
+            <a:pPr lvl="0"/>
+            <a:r>
+              <a:rPr/>
+              <a:t>What could a “reproducible by design” language look like?</a:t>
+            </a:r>
+          </a:p>
+          <a:p>
+            <a:pPr lvl="0"/>
+            <a:r>
+              <a:rPr/>
+              <a:t>This is T, a language whose package manager is Nix and pipelines are first-class citizens</a:t>
             </a:r>
           </a:p>
         </p:txBody>
@@ -5498,7 +5489,7 @@
             </a:pPr>
             <a:r>
               <a:rPr/>
-              <a:t>T, a new DSL for polyglot data science</a:t>
+              <a:t>T is reproducible by design</a:t>
             </a:r>
           </a:p>
         </p:txBody>
@@ -5521,28 +5512,62 @@
             <a:pPr lvl="0"/>
             <a:r>
               <a:rPr/>
-              <a:t>Reproducibility is often an afterthought, with ad-hoc tools</a:t>
-            </a:r>
-          </a:p>
-          <a:p>
-            <a:pPr lvl="0"/>
-            <a:r>
-              <a:rPr/>
-              <a:t>Nix eases the pain, but humans have to play ball! (biggest challenge)</a:t>
-            </a:r>
-          </a:p>
-          <a:p>
-            <a:pPr lvl="0"/>
-            <a:r>
-              <a:rPr/>
-              <a:t>What could a “reproducible by design” language look like?</a:t>
-            </a:r>
-          </a:p>
-          <a:p>
-            <a:pPr lvl="0"/>
-            <a:r>
-              <a:rPr/>
-              <a:t>This is T, a language whose package manager is Nix and pipelines are first-class citizens</a:t>
+              <a:t>A new T project is a Nix project:</a:t>
+            </a:r>
+          </a:p>
+          <a:p>
+            <a:pPr lvl="0" indent="0" marL="0">
+              <a:buNone/>
+            </a:pPr>
+            <a:r>
+              <a:rPr/>
+              <a:t>. . .</a:t>
+            </a:r>
+          </a:p>
+          <a:p>
+            <a:pPr lvl="0" indent="0">
+              <a:buNone/>
+            </a:pPr>
+            <a:r>
+              <a:rPr>
+                <a:solidFill>
+                  <a:srgbClr val="003B4F"/>
+                </a:solidFill>
+                <a:latin typeface="Courier"/>
+              </a:rPr>
+              <a:t>nix shell github:b-rodrigues/tlang</a:t>
+            </a:r>
+          </a:p>
+          <a:p>
+            <a:pPr lvl="0" indent="0" marL="0">
+              <a:buNone/>
+            </a:pPr>
+            <a:r>
+              <a:rPr/>
+              <a:t>. . .</a:t>
+            </a:r>
+          </a:p>
+          <a:p>
+            <a:pPr lvl="0" indent="0">
+              <a:buNone/>
+            </a:pPr>
+            <a:r>
+              <a:rPr>
+                <a:solidFill>
+                  <a:srgbClr val="003B4F"/>
+                </a:solidFill>
+                <a:latin typeface="Courier"/>
+              </a:rPr>
+              <a:t>t init </a:t>
+            </a:r>
+            <a:r>
+              <a:rPr>
+                <a:solidFill>
+                  <a:srgbClr val="657422"/>
+                </a:solidFill>
+                <a:latin typeface="Courier"/>
+              </a:rPr>
+              <a:t>--project</a:t>
             </a:r>
           </a:p>
         </p:txBody>
@@ -5681,65 +5706,24 @@
           <a:bodyPr/>
           <a:lstStyle/>
           <a:p>
-            <a:pPr lvl="0"/>
-            <a:r>
-              <a:rPr/>
-              <a:t>A new T project is a Nix project:</a:t>
-            </a:r>
-          </a:p>
-          <a:p>
-            <a:pPr lvl="0" indent="0" marL="0">
+            <a:pPr lvl="0" indent="0">
               <a:buNone/>
             </a:pPr>
             <a:r>
-              <a:rPr/>
-              <a:t>. . .</a:t>
-            </a:r>
-          </a:p>
-          <a:p>
-            <a:pPr lvl="0" indent="0">
-              <a:buNone/>
-            </a:pPr>
-            <a:r>
-              <a:rPr>
-                <a:solidFill>
-                  <a:srgbClr val="003B4F"/>
-                </a:solidFill>
-                <a:latin typeface="Courier"/>
-              </a:rPr>
-              <a:t>nix shell github:b-rodrigues/tlang</a:t>
-            </a:r>
-          </a:p>
-          <a:p>
-            <a:pPr lvl="0" indent="0" marL="0">
-              <a:buNone/>
-            </a:pPr>
-            <a:r>
-              <a:rPr/>
-              <a:t>. . .</a:t>
-            </a:r>
-          </a:p>
-          <a:p>
-            <a:pPr lvl="0" indent="0">
-              <a:buNone/>
-            </a:pPr>
-            <a:r>
-              <a:rPr>
-                <a:solidFill>
-                  <a:srgbClr val="003B4F"/>
-                </a:solidFill>
-                <a:latin typeface="Courier"/>
-              </a:rPr>
-              <a:t>t init </a:t>
-            </a:r>
-            <a:r>
-              <a:rPr>
-                <a:solidFill>
-                  <a:srgbClr val="657422"/>
-                </a:solidFill>
-                <a:latin typeface="Courier"/>
-              </a:rPr>
-              <a:t>--project</a:t>
+              <a:rPr>
+                <a:latin typeface="Courier"/>
+              </a:rPr>
+              <a:t>my_analysis/
+├── tproject.toml       # Project configuration and dependencies
+├── flake.nix           # Reproducible environment definition
+├── README.md           # Project overview
+├── AGENTS.md           # Onboarding guide for AI Agents
+├── T-LANGUAGE-REFERENCE.md # Tiered language reference for LLMs (git-ignored)
+├── src/
+│   └── pipeline.t      # Your main analysis script
+├── data/               # Place your raw data files here
+├── outputs/            # Output directory for results
+└── tests/              # Unit tests for your analysis</a:t>
             </a:r>
           </a:p>
         </p:txBody>
@@ -5806,24 +5790,62 @@
           <a:bodyPr/>
           <a:lstStyle/>
           <a:p>
-            <a:pPr lvl="0" indent="0">
-              <a:buNone/>
-            </a:pPr>
-            <a:r>
-              <a:rPr>
-                <a:latin typeface="Courier"/>
-              </a:rPr>
-              <a:t>my_analysis/
-├── tproject.toml       # Project configuration and dependencies
-├── flake.nix           # Reproducible environment definition
-├── README.md           # Project overview
-├── AGENTS.md           # Onboarding guide for AI Agents
-├── T-LANGUAGE-REFERENCE.md # Tiered language reference for LLMs (git-ignored)
-├── src/
-│   └── pipeline.t      # Your main analysis script
-├── data/               # Place your raw data files here
-├── outputs/            # Output directory for results
-└── tests/              # Unit tests for your analysis</a:t>
+            <a:pPr lvl="0"/>
+            <a:r>
+              <a:rPr/>
+              <a:t>Add R, Python or Julia dependecies to </a:t>
+            </a:r>
+            <a:r>
+              <a:rPr>
+                <a:latin typeface="Courier"/>
+              </a:rPr>
+              <a:t>tproject.toml</a:t>
+            </a:r>
+          </a:p>
+          <a:p>
+            <a:pPr lvl="0"/>
+            <a:r>
+              <a:rPr/>
+              <a:t>Run </a:t>
+            </a:r>
+            <a:r>
+              <a:rPr>
+                <a:latin typeface="Courier"/>
+              </a:rPr>
+              <a:t>t update</a:t>
+            </a:r>
+          </a:p>
+          <a:p>
+            <a:pPr lvl="0"/>
+            <a:r>
+              <a:rPr/>
+              <a:t>Exit the temporary shell and run </a:t>
+            </a:r>
+            <a:r>
+              <a:rPr>
+                <a:latin typeface="Courier"/>
+              </a:rPr>
+              <a:t>nix develop</a:t>
+            </a:r>
+          </a:p>
+          <a:p>
+            <a:pPr lvl="0"/>
+            <a:r>
+              <a:rPr/>
+              <a:t>Environment is set up, ready to use!</a:t>
+            </a:r>
+          </a:p>
+          <a:p>
+            <a:pPr lvl="0"/>
+            <a:r>
+              <a:rPr/>
+              <a:t>What pipelines look like </a:t>
+            </a:r>
+            <a:r>
+              <a:rPr>
+                <a:hlinkClick r:id="rId2"/>
+              </a:rPr>
+              <a:t>see here</a:t>
             </a:r>
           </a:p>
         </p:txBody>
@@ -5870,7 +5892,7 @@
             </a:pPr>
             <a:r>
               <a:rPr/>
-              <a:t>T is reproducible by design</a:t>
+              <a:t>Learning a new language in 2026?!</a:t>
             </a:r>
           </a:p>
         </p:txBody>
@@ -5893,59 +5915,62 @@
             <a:pPr lvl="0"/>
             <a:r>
               <a:rPr/>
-              <a:t>Add R, Python or Julia dependecies to </a:t>
-            </a:r>
-            <a:r>
-              <a:rPr>
-                <a:latin typeface="Courier"/>
-              </a:rPr>
-              <a:t>tproject.toml</a:t>
-            </a:r>
-          </a:p>
-          <a:p>
-            <a:pPr lvl="0"/>
-            <a:r>
-              <a:rPr/>
-              <a:t>Run </a:t>
-            </a:r>
-            <a:r>
-              <a:rPr>
-                <a:latin typeface="Courier"/>
-              </a:rPr>
-              <a:t>t update</a:t>
-            </a:r>
-          </a:p>
-          <a:p>
-            <a:pPr lvl="0"/>
-            <a:r>
-              <a:rPr/>
-              <a:t>Exit the temporary shell and run </a:t>
-            </a:r>
-            <a:r>
-              <a:rPr>
-                <a:latin typeface="Courier"/>
-              </a:rPr>
-              <a:t>nix develop</a:t>
-            </a:r>
-          </a:p>
-          <a:p>
-            <a:pPr lvl="0"/>
-            <a:r>
-              <a:rPr/>
-              <a:t>Environment is set up, ready to use!</a:t>
-            </a:r>
-          </a:p>
-          <a:p>
-            <a:pPr lvl="0"/>
-            <a:r>
-              <a:rPr/>
-              <a:t>What pipelines look like </a:t>
-            </a:r>
-            <a:r>
-              <a:rPr>
-                <a:hlinkClick r:id="rId2"/>
-              </a:rPr>
-              <a:t>see here</a:t>
+              <a:t>Learning a new language just for pipelines? Never!!</a:t>
+            </a:r>
+          </a:p>
+          <a:p>
+            <a:pPr lvl="0"/>
+            <a:r>
+              <a:rPr/>
+              <a:t>T is built to be </a:t>
+            </a:r>
+            <a:r>
+              <a:rPr i="1"/>
+              <a:t>llm-friendly</a:t>
+            </a:r>
+          </a:p>
+          <a:p>
+            <a:pPr lvl="0"/>
+            <a:r>
+              <a:rPr/>
+              <a:t>Projects ship </a:t>
+            </a:r>
+            <a:r>
+              <a:rPr>
+                <a:latin typeface="Courier"/>
+              </a:rPr>
+              <a:t>AGENTS.md</a:t>
+            </a:r>
+            <a:r>
+              <a:rPr/>
+              <a:t>, </a:t>
+            </a:r>
+            <a:r>
+              <a:rPr>
+                <a:latin typeface="Courier"/>
+              </a:rPr>
+              <a:t>T-LANGUAGE-REFERENCE.md</a:t>
+            </a:r>
+            <a:r>
+              <a:rPr/>
+              <a:t> and </a:t>
+            </a:r>
+            <a:r>
+              <a:rPr>
+                <a:latin typeface="Courier"/>
+              </a:rPr>
+              <a:t>src/pipeline.t</a:t>
+            </a:r>
+            <a:r>
+              <a:rPr/>
+              <a:t> itself is a cheatsheet</a:t>
+            </a:r>
+          </a:p>
+          <a:p>
+            <a:pPr lvl="0"/>
+            <a:r>
+              <a:rPr/>
+              <a:t>LLMs should be able to wire your project using T without much issue!</a:t>
             </a:r>
           </a:p>
         </p:txBody>
@@ -5992,7 +6017,7 @@
             </a:pPr>
             <a:r>
               <a:rPr/>
-              <a:t>Learning a new language in 2026?!</a:t>
+              <a:t>Caveat Emptor</a:t>
             </a:r>
           </a:p>
         </p:txBody>
@@ -6015,62 +6040,28 @@
             <a:pPr lvl="0"/>
             <a:r>
               <a:rPr/>
-              <a:t>Learning a new language just for pipelines? Never!!</a:t>
-            </a:r>
-          </a:p>
-          <a:p>
-            <a:pPr lvl="0"/>
-            <a:r>
-              <a:rPr/>
-              <a:t>T is built to be </a:t>
-            </a:r>
-            <a:r>
-              <a:rPr i="1"/>
-              <a:t>llm-friendly</a:t>
-            </a:r>
-          </a:p>
-          <a:p>
-            <a:pPr lvl="0"/>
-            <a:r>
-              <a:rPr/>
-              <a:t>Projects ship </a:t>
-            </a:r>
-            <a:r>
-              <a:rPr>
-                <a:latin typeface="Courier"/>
-              </a:rPr>
-              <a:t>AGENTS.md</a:t>
-            </a:r>
-            <a:r>
-              <a:rPr/>
-              <a:t>, </a:t>
-            </a:r>
-            <a:r>
-              <a:rPr>
-                <a:latin typeface="Courier"/>
-              </a:rPr>
-              <a:t>T-LANGUAGE-REFERENCE.md</a:t>
-            </a:r>
-            <a:r>
-              <a:rPr/>
-              <a:t> and </a:t>
-            </a:r>
-            <a:r>
-              <a:rPr>
-                <a:latin typeface="Courier"/>
-              </a:rPr>
-              <a:t>src/pipeline.t</a:t>
-            </a:r>
-            <a:r>
-              <a:rPr/>
-              <a:t> itself is a cheatsheet</a:t>
-            </a:r>
-          </a:p>
-          <a:p>
-            <a:pPr lvl="0"/>
-            <a:r>
-              <a:rPr/>
-              <a:t>LLMs should be able to wire your project using T without much issue!</a:t>
+              <a:t>This is a 100% vibe-coded side-project by yours truly…</a:t>
+            </a:r>
+          </a:p>
+          <a:p>
+            <a:pPr lvl="0"/>
+            <a:r>
+              <a:rPr/>
+              <a:t>…but throughly tested (2000+ unit tests and 60+ end-to-end tests)</a:t>
+            </a:r>
+          </a:p>
+          <a:p>
+            <a:pPr lvl="0"/>
+            <a:r>
+              <a:rPr/>
+              <a:t>I wanted to stress-test the idea of a “reproducible by design” language</a:t>
+            </a:r>
+          </a:p>
+          <a:p>
+            <a:pPr lvl="0"/>
+            <a:r>
+              <a:rPr/>
+              <a:t>Challenges: input/output between languages</a:t>
             </a:r>
           </a:p>
         </p:txBody>
@@ -6117,7 +6108,7 @@
             </a:pPr>
             <a:r>
               <a:rPr/>
-              <a:t>Caveat Emptor</a:t>
+              <a:t>How did I build T?</a:t>
             </a:r>
           </a:p>
         </p:txBody>
@@ -6140,28 +6131,49 @@
             <a:pPr lvl="0"/>
             <a:r>
               <a:rPr/>
-              <a:t>This is a 100% vibe-coded side-project by yours truly…</a:t>
-            </a:r>
-          </a:p>
-          <a:p>
-            <a:pPr lvl="0"/>
-            <a:r>
-              <a:rPr/>
-              <a:t>…but throughly tested (2000+ unit tests and 60+ end-to-end tests)</a:t>
-            </a:r>
-          </a:p>
-          <a:p>
-            <a:pPr lvl="0"/>
-            <a:r>
-              <a:rPr/>
-              <a:t>I wanted to stress-test the idea of a “reproducible by design” language</a:t>
-            </a:r>
-          </a:p>
-          <a:p>
-            <a:pPr lvl="0"/>
-            <a:r>
-              <a:rPr/>
-              <a:t>Challenges: input/output between languages</a:t>
+              <a:t>100% LLM generated Ocaml code</a:t>
+            </a:r>
+          </a:p>
+          <a:p>
+            <a:pPr lvl="0"/>
+            <a:r>
+              <a:rPr/>
+              <a:t>Start with a specification doc</a:t>
+            </a:r>
+          </a:p>
+          <a:p>
+            <a:pPr lvl="0"/>
+            <a:r>
+              <a:rPr/>
+              <a:t>Keep brainstorming, refining…</a:t>
+            </a:r>
+          </a:p>
+          <a:p>
+            <a:pPr lvl="0"/>
+            <a:r>
+              <a:rPr/>
+              <a:t>Give the doc to an LLM</a:t>
+            </a:r>
+          </a:p>
+          <a:p>
+            <a:pPr lvl="0"/>
+            <a:r>
+              <a:rPr/>
+              <a:t>Let another LLM review the work</a:t>
+            </a:r>
+          </a:p>
+          <a:p>
+            <a:pPr lvl="0"/>
+            <a:r>
+              <a:rPr/>
+              <a:t>Implement and review tests</a:t>
+            </a:r>
+          </a:p>
+          <a:p>
+            <a:pPr lvl="0"/>
+            <a:r>
+              <a:rPr/>
+              <a:t>Repeat!</a:t>
             </a:r>
           </a:p>
         </p:txBody>
@@ -6172,118 +6184,6 @@
 </file>
 
 <file path=ppt/slides/slide25.xml><?xml version="1.0" encoding="utf-8"?>
-<p:sld xmlns:a="http://schemas.openxmlformats.org/drawingml/2006/main" xmlns:r="http://schemas.openxmlformats.org/officeDocument/2006/relationships" xmlns:p="http://schemas.openxmlformats.org/presentationml/2006/main">
-  <p:cSld>
-    <p:spTree>
-      <p:nvGrpSpPr>
-        <p:cNvPr id="1" name=""/>
-        <p:cNvGrpSpPr/>
-        <p:nvPr/>
-      </p:nvGrpSpPr>
-      <p:grpSpPr>
-        <a:xfrm>
-          <a:off x="0" y="0"/>
-          <a:ext cx="0" cy="0"/>
-          <a:chOff x="0" y="0"/>
-          <a:chExt cx="0" cy="0"/>
-        </a:xfrm>
-      </p:grpSpPr>
-      <p:sp>
-        <p:nvSpPr>
-          <p:cNvPr id="2" name="Title 1"/>
-          <p:cNvSpPr>
-            <a:spLocks noGrp="1"/>
-          </p:cNvSpPr>
-          <p:nvPr>
-            <p:ph type="title"/>
-          </p:nvPr>
-        </p:nvSpPr>
-        <p:spPr/>
-        <p:txBody>
-          <a:bodyPr/>
-          <a:lstStyle/>
-          <a:p>
-            <a:pPr lvl="0" indent="0" marL="0">
-              <a:buNone/>
-            </a:pPr>
-            <a:r>
-              <a:rPr/>
-              <a:t>How did I build T?</a:t>
-            </a:r>
-          </a:p>
-        </p:txBody>
-      </p:sp>
-      <p:sp>
-        <p:nvSpPr>
-          <p:cNvPr id="3" name="Content Placeholder 2"/>
-          <p:cNvSpPr>
-            <a:spLocks noGrp="1"/>
-          </p:cNvSpPr>
-          <p:nvPr>
-            <p:ph idx="1"/>
-          </p:nvPr>
-        </p:nvSpPr>
-        <p:spPr/>
-        <p:txBody>
-          <a:bodyPr/>
-          <a:lstStyle/>
-          <a:p>
-            <a:pPr lvl="0"/>
-            <a:r>
-              <a:rPr/>
-              <a:t>100% LLM generated Ocaml code</a:t>
-            </a:r>
-          </a:p>
-          <a:p>
-            <a:pPr lvl="0"/>
-            <a:r>
-              <a:rPr/>
-              <a:t>Start with a specification doc</a:t>
-            </a:r>
-          </a:p>
-          <a:p>
-            <a:pPr lvl="0"/>
-            <a:r>
-              <a:rPr/>
-              <a:t>Keep brainstorming, refining…</a:t>
-            </a:r>
-          </a:p>
-          <a:p>
-            <a:pPr lvl="0"/>
-            <a:r>
-              <a:rPr/>
-              <a:t>Give the doc to an LLM</a:t>
-            </a:r>
-          </a:p>
-          <a:p>
-            <a:pPr lvl="0"/>
-            <a:r>
-              <a:rPr/>
-              <a:t>Let another LLM review the work</a:t>
-            </a:r>
-          </a:p>
-          <a:p>
-            <a:pPr lvl="0"/>
-            <a:r>
-              <a:rPr/>
-              <a:t>Implement and review tests</a:t>
-            </a:r>
-          </a:p>
-          <a:p>
-            <a:pPr lvl="0"/>
-            <a:r>
-              <a:rPr/>
-              <a:t>Repeat!</a:t>
-            </a:r>
-          </a:p>
-        </p:txBody>
-      </p:sp>
-    </p:spTree>
-  </p:cSld>
-</p:sld>
-</file>
-
-<file path=ppt/slides/slide26.xml><?xml version="1.0" encoding="utf-8"?>
 <p:sld xmlns:a="http://schemas.openxmlformats.org/drawingml/2006/main" xmlns:r="http://schemas.openxmlformats.org/officeDocument/2006/relationships" xmlns:p="http://schemas.openxmlformats.org/presentationml/2006/main">
   <p:cSld>
     <p:spTree>
@@ -6585,36 +6485,43 @@
           </a:p>
         </p:txBody>
       </p:sp>
-      <p:pic>
-        <p:nvPicPr>
-          <p:cNvPr descr="img/luxembourg2.png" id="0" name="Picture 1"/>
-          <p:cNvPicPr>
-            <a:picLocks noGrp="1" noChangeAspect="1"/>
-          </p:cNvPicPr>
-          <p:nvPr/>
-        </p:nvPicPr>
-        <p:blipFill>
-          <a:blip r:embed="rId2"/>
-          <a:stretch>
-            <a:fillRect/>
-          </a:stretch>
-        </p:blipFill>
-        <p:spPr bwMode="auto">
-          <a:xfrm>
-            <a:off x="457200" y="1397000"/>
-            <a:ext cx="8229600" cy="2997200"/>
-          </a:xfrm>
-          <a:prstGeom prst="rect">
-            <a:avLst/>
-          </a:prstGeom>
-          <a:noFill/>
-          <a:ln w="9525">
-            <a:noFill/>
-            <a:headEnd/>
-            <a:tailEnd/>
-          </a:ln>
-        </p:spPr>
-      </p:pic>
+      <p:sp>
+        <p:nvSpPr>
+          <p:cNvPr id="3" name="Content Placeholder 2"/>
+          <p:cNvSpPr>
+            <a:spLocks noGrp="1"/>
+          </p:cNvSpPr>
+          <p:nvPr>
+            <p:ph idx="1"/>
+          </p:nvPr>
+        </p:nvSpPr>
+        <p:spPr/>
+        <p:txBody>
+          <a:bodyPr/>
+          <a:lstStyle/>
+          <a:p>
+            <a:pPr lvl="0"/>
+            <a:r>
+              <a:rPr/>
+              <a:t>Sole Grand-Duchy in the World</a:t>
+            </a:r>
+          </a:p>
+          <a:p>
+            <a:pPr lvl="0"/>
+            <a:r>
+              <a:rPr/>
+              <a:t>3 official languages (Luxembourguish, German, French)</a:t>
+            </a:r>
+          </a:p>
+          <a:p>
+            <a:pPr lvl="0"/>
+            <a:r>
+              <a:rPr/>
+              <a:t>A founder of the European Union</a:t>
+            </a:r>
+          </a:p>
+        </p:txBody>
+      </p:sp>
     </p:spTree>
   </p:cSld>
 </p:sld>
@@ -6657,7 +6564,7 @@
             </a:pPr>
             <a:r>
               <a:rPr/>
-              <a:t>Intro: Luxembourg?</a:t>
+              <a:t>Intro: where to find the code</a:t>
             </a:r>
           </a:p>
         </p:txBody>
@@ -6677,24 +6584,43 @@
           <a:bodyPr/>
           <a:lstStyle/>
           <a:p>
-            <a:pPr lvl="0"/>
-            <a:r>
-              <a:rPr/>
-              <a:t>Sole Grand-Duchy in the World</a:t>
-            </a:r>
-          </a:p>
-          <a:p>
-            <a:pPr lvl="0"/>
-            <a:r>
-              <a:rPr/>
-              <a:t>3 official languages (Luxembourguish, German, French)</a:t>
-            </a:r>
-          </a:p>
-          <a:p>
-            <a:pPr lvl="0"/>
-            <a:r>
-              <a:rPr/>
-              <a:t>A founder of the European Union</a:t>
+            <a:pPr lvl="0" indent="0" marL="0">
+              <a:buNone/>
+            </a:pPr>
+            <a:r>
+              <a:rPr/>
+              <a:t>Slides available online:</a:t>
+            </a:r>
+          </a:p>
+          <a:p>
+            <a:pPr lvl="0" indent="0" marL="0">
+              <a:buNone/>
+            </a:pPr>
+            <a:r>
+              <a:rPr>
+                <a:hlinkClick r:id="rId2"/>
+              </a:rPr>
+              <a:t>https://b-rodrigues.github.io/repro_unilorn</a:t>
+            </a:r>
+          </a:p>
+          <a:p>
+            <a:pPr lvl="0" indent="0" marL="0">
+              <a:buNone/>
+            </a:pPr>
+            <a:r>
+              <a:rPr/>
+              <a:t>Code available here:</a:t>
+            </a:r>
+          </a:p>
+          <a:p>
+            <a:pPr lvl="0" indent="0" marL="0">
+              <a:buNone/>
+            </a:pPr>
+            <a:r>
+              <a:rPr>
+                <a:hlinkClick r:id="rId3"/>
+              </a:rPr>
+              <a:t>https://github.com/b-rodrigues/repro_unilorn</a:t>
             </a:r>
           </a:p>
         </p:txBody>
@@ -6741,7 +6667,7 @@
             </a:pPr>
             <a:r>
               <a:rPr/>
-              <a:t>Intro: where to find the code</a:t>
+              <a:t>What I’ll be talking about</a:t>
             </a:r>
           </a:p>
         </p:txBody>
@@ -6761,43 +6687,10 @@
           <a:bodyPr/>
           <a:lstStyle/>
           <a:p>
-            <a:pPr lvl="0" indent="0" marL="0">
-              <a:buNone/>
-            </a:pPr>
-            <a:r>
-              <a:rPr/>
-              <a:t>Slides available online:</a:t>
-            </a:r>
-          </a:p>
-          <a:p>
-            <a:pPr lvl="0" indent="0" marL="0">
-              <a:buNone/>
-            </a:pPr>
-            <a:r>
-              <a:rPr>
-                <a:hlinkClick r:id="rId2"/>
-              </a:rPr>
-              <a:t>https://b-rodrigues.github.io/repro_unilorn</a:t>
-            </a:r>
-          </a:p>
-          <a:p>
-            <a:pPr lvl="0" indent="0" marL="0">
-              <a:buNone/>
-            </a:pPr>
-            <a:r>
-              <a:rPr/>
-              <a:t>Code available here:</a:t>
-            </a:r>
-          </a:p>
-          <a:p>
-            <a:pPr lvl="0" indent="0" marL="0">
-              <a:buNone/>
-            </a:pPr>
-            <a:r>
-              <a:rPr>
-                <a:hlinkClick r:id="rId3"/>
-              </a:rPr>
-              <a:t>https://github.com/b-rodrigues/repro_unilorn</a:t>
+            <a:pPr lvl="0"/>
+            <a:r>
+              <a:rPr/>
+              <a:t>Reproducibility of data projects</a:t>
             </a:r>
           </a:p>
         </p:txBody>
@@ -6844,7 +6737,7 @@
             </a:pPr>
             <a:r>
               <a:rPr/>
-              <a:t>What I’ll be talking about</a:t>
+              <a:t>Available solutions for R</a:t>
             </a:r>
           </a:p>
         </p:txBody>
@@ -6866,8 +6759,81 @@
           <a:p>
             <a:pPr lvl="0"/>
             <a:r>
-              <a:rPr/>
-              <a:t>Reproducibility of data projects</a:t>
+              <a:rPr>
+                <a:latin typeface="Courier"/>
+              </a:rPr>
+              <a:t>{renv}</a:t>
+            </a:r>
+            <a:r>
+              <a:rPr/>
+              <a:t> or </a:t>
+            </a:r>
+            <a:r>
+              <a:rPr>
+                <a:latin typeface="Courier"/>
+              </a:rPr>
+              <a:t>{groundhog}</a:t>
+            </a:r>
+            <a:r>
+              <a:rPr/>
+              <a:t>: simple to use, but:</a:t>
+            </a:r>
+          </a:p>
+          <a:p>
+            <a:pPr lvl="1"/>
+            <a:r>
+              <a:rPr/>
+              <a:t>Doesn’t save the R version</a:t>
+            </a:r>
+          </a:p>
+          <a:p>
+            <a:pPr lvl="1"/>
+            <a:r>
+              <a:rPr/>
+              <a:t>Installing old packages may fail (system dependencies)</a:t>
+            </a:r>
+          </a:p>
+          <a:p>
+            <a:pPr lvl="0"/>
+            <a:r>
+              <a:rPr/>
+              <a:t>Docker goes further:</a:t>
+            </a:r>
+          </a:p>
+          <a:p>
+            <a:pPr lvl="1"/>
+            <a:r>
+              <a:rPr/>
+              <a:t>Manages R </a:t>
+            </a:r>
+            <a:r>
+              <a:rPr i="1"/>
+              <a:t>and</a:t>
+            </a:r>
+            <a:r>
+              <a:rPr/>
+              <a:t> system dependencies</a:t>
+            </a:r>
+          </a:p>
+          <a:p>
+            <a:pPr lvl="1"/>
+            <a:r>
+              <a:rPr/>
+              <a:t>Containers executable anywhere</a:t>
+            </a:r>
+          </a:p>
+          <a:p>
+            <a:pPr lvl="0"/>
+            <a:r>
+              <a:rPr/>
+              <a:t>But:</a:t>
+            </a:r>
+          </a:p>
+          <a:p>
+            <a:pPr lvl="1"/>
+            <a:r>
+              <a:rPr/>
+              <a:t>Not inherently reproducible</a:t>
             </a:r>
           </a:p>
         </p:txBody>
@@ -6878,149 +6844,6 @@
 </file>
 
 <file path=ppt/slides/slide8.xml><?xml version="1.0" encoding="utf-8"?>
-<p:sld xmlns:a="http://schemas.openxmlformats.org/drawingml/2006/main" xmlns:r="http://schemas.openxmlformats.org/officeDocument/2006/relationships" xmlns:p="http://schemas.openxmlformats.org/presentationml/2006/main">
-  <p:cSld>
-    <p:spTree>
-      <p:nvGrpSpPr>
-        <p:cNvPr id="1" name=""/>
-        <p:cNvGrpSpPr/>
-        <p:nvPr/>
-      </p:nvGrpSpPr>
-      <p:grpSpPr>
-        <a:xfrm>
-          <a:off x="0" y="0"/>
-          <a:ext cx="0" cy="0"/>
-          <a:chOff x="0" y="0"/>
-          <a:chExt cx="0" cy="0"/>
-        </a:xfrm>
-      </p:grpSpPr>
-      <p:sp>
-        <p:nvSpPr>
-          <p:cNvPr id="2" name="Title 1"/>
-          <p:cNvSpPr>
-            <a:spLocks noGrp="1"/>
-          </p:cNvSpPr>
-          <p:nvPr>
-            <p:ph type="title"/>
-          </p:nvPr>
-        </p:nvSpPr>
-        <p:spPr/>
-        <p:txBody>
-          <a:bodyPr/>
-          <a:lstStyle/>
-          <a:p>
-            <a:pPr lvl="0" indent="0" marL="0">
-              <a:buNone/>
-            </a:pPr>
-            <a:r>
-              <a:rPr/>
-              <a:t>Available solutions for R</a:t>
-            </a:r>
-          </a:p>
-        </p:txBody>
-      </p:sp>
-      <p:sp>
-        <p:nvSpPr>
-          <p:cNvPr id="3" name="Content Placeholder 2"/>
-          <p:cNvSpPr>
-            <a:spLocks noGrp="1"/>
-          </p:cNvSpPr>
-          <p:nvPr>
-            <p:ph idx="1"/>
-          </p:nvPr>
-        </p:nvSpPr>
-        <p:spPr/>
-        <p:txBody>
-          <a:bodyPr/>
-          <a:lstStyle/>
-          <a:p>
-            <a:pPr lvl="0"/>
-            <a:r>
-              <a:rPr>
-                <a:latin typeface="Courier"/>
-              </a:rPr>
-              <a:t>{renv}</a:t>
-            </a:r>
-            <a:r>
-              <a:rPr/>
-              <a:t> or </a:t>
-            </a:r>
-            <a:r>
-              <a:rPr>
-                <a:latin typeface="Courier"/>
-              </a:rPr>
-              <a:t>{groundhog}</a:t>
-            </a:r>
-            <a:r>
-              <a:rPr/>
-              <a:t>: simple to use, but:</a:t>
-            </a:r>
-          </a:p>
-          <a:p>
-            <a:pPr lvl="1"/>
-            <a:r>
-              <a:rPr/>
-              <a:t>Doesn’t save the R version</a:t>
-            </a:r>
-          </a:p>
-          <a:p>
-            <a:pPr lvl="1"/>
-            <a:r>
-              <a:rPr/>
-              <a:t>Installing old packages may fail (system dependencies)</a:t>
-            </a:r>
-          </a:p>
-          <a:p>
-            <a:pPr lvl="0"/>
-            <a:r>
-              <a:rPr/>
-              <a:t>Docker goes further:</a:t>
-            </a:r>
-          </a:p>
-          <a:p>
-            <a:pPr lvl="1"/>
-            <a:r>
-              <a:rPr/>
-              <a:t>Manages R </a:t>
-            </a:r>
-            <a:r>
-              <a:rPr i="1"/>
-              <a:t>and</a:t>
-            </a:r>
-            <a:r>
-              <a:rPr/>
-              <a:t> system dependencies</a:t>
-            </a:r>
-          </a:p>
-          <a:p>
-            <a:pPr lvl="1"/>
-            <a:r>
-              <a:rPr/>
-              <a:t>Containers executable anywhere</a:t>
-            </a:r>
-          </a:p>
-          <a:p>
-            <a:pPr lvl="0"/>
-            <a:r>
-              <a:rPr/>
-              <a:t>But:</a:t>
-            </a:r>
-          </a:p>
-          <a:p>
-            <a:pPr lvl="1"/>
-            <a:r>
-              <a:rPr/>
-              <a:t>Not inherently reproducible</a:t>
-            </a:r>
-          </a:p>
-        </p:txBody>
-      </p:sp>
-    </p:spTree>
-  </p:cSld>
-</p:sld>
-</file>
-
-<file path=ppt/slides/slide9.xml><?xml version="1.0" encoding="utf-8"?>
 <p:sld xmlns:a="http://schemas.openxmlformats.org/drawingml/2006/main" xmlns:r="http://schemas.openxmlformats.org/officeDocument/2006/relationships" xmlns:p="http://schemas.openxmlformats.org/presentationml/2006/main">
   <p:cSld>
     <p:spTree>
@@ -7181,6 +7004,105 @@
             <a:r>
               <a:rPr/>
               <a:t>Google Play Store</a:t>
+            </a:r>
+          </a:p>
+        </p:txBody>
+      </p:sp>
+    </p:spTree>
+  </p:cSld>
+</p:sld>
+</file>
+
+<file path=ppt/slides/slide9.xml><?xml version="1.0" encoding="utf-8"?>
+<p:sld xmlns:a="http://schemas.openxmlformats.org/drawingml/2006/main" xmlns:r="http://schemas.openxmlformats.org/officeDocument/2006/relationships" xmlns:p="http://schemas.openxmlformats.org/presentationml/2006/main">
+  <p:cSld>
+    <p:spTree>
+      <p:nvGrpSpPr>
+        <p:cNvPr id="1" name=""/>
+        <p:cNvGrpSpPr/>
+        <p:nvPr/>
+      </p:nvGrpSpPr>
+      <p:grpSpPr>
+        <a:xfrm>
+          <a:off x="0" y="0"/>
+          <a:ext cx="0" cy="0"/>
+          <a:chOff x="0" y="0"/>
+          <a:chExt cx="0" cy="0"/>
+        </a:xfrm>
+      </p:grpSpPr>
+      <p:sp>
+        <p:nvSpPr>
+          <p:cNvPr id="2" name="Title 1"/>
+          <p:cNvSpPr>
+            <a:spLocks noGrp="1"/>
+          </p:cNvSpPr>
+          <p:nvPr>
+            <p:ph type="title"/>
+          </p:nvPr>
+        </p:nvSpPr>
+        <p:spPr/>
+        <p:txBody>
+          <a:bodyPr/>
+          <a:lstStyle/>
+          <a:p>
+            <a:pPr lvl="0" indent="0" marL="0">
+              <a:buNone/>
+            </a:pPr>
+            <a:r>
+              <a:rPr/>
+              <a:t>The Nix package manager (2/2)</a:t>
+            </a:r>
+          </a:p>
+        </p:txBody>
+      </p:sp>
+      <p:sp>
+        <p:nvSpPr>
+          <p:cNvPr id="3" name="Content Placeholder 2"/>
+          <p:cNvSpPr>
+            <a:spLocks noGrp="1"/>
+          </p:cNvSpPr>
+          <p:nvPr>
+            <p:ph idx="1"/>
+          </p:nvPr>
+        </p:nvSpPr>
+        <p:spPr/>
+        <p:txBody>
+          <a:bodyPr/>
+          <a:lstStyle/>
+          <a:p>
+            <a:pPr lvl="0"/>
+            <a:r>
+              <a:rPr/>
+              <a:t>To ensure reproducibility: R, R packages, and other dependencies must be explicitly managed</a:t>
+            </a:r>
+          </a:p>
+          <a:p>
+            <a:pPr lvl="0"/>
+            <a:r>
+              <a:rPr/>
+              <a:t>Nix is a package manager truly focused on reproducible builds</a:t>
+            </a:r>
+          </a:p>
+          <a:p>
+            <a:pPr lvl="0"/>
+            <a:r>
+              <a:rPr/>
+              <a:t>Nix manages everything using a single text file (called a Nix expression)!</a:t>
+            </a:r>
+          </a:p>
+          <a:p>
+            <a:pPr lvl="0"/>
+            <a:r>
+              <a:rPr/>
+              <a:t>These expressions </a:t>
+            </a:r>
+            <a:r>
+              <a:rPr i="1"/>
+              <a:t>always</a:t>
+            </a:r>
+            <a:r>
+              <a:rPr/>
+              <a:t> produce exactly the same result</a:t>
             </a:r>
           </a:p>
         </p:txBody>

--- a/docs/index.pptx
+++ b/docs/index.pptx
@@ -5122,7 +5122,7 @@
                 </a:solidFill>
                 <a:latin typeface="Courier"/>
               </a:rPr>
-              <a:t>rixpress</a:t>
+              <a:t>rxp_make</a:t>
             </a:r>
             <a:r>
               <a:rPr>
